--- a/docs/demo/Kelvoy可旅_DEMO-V0.3.pptx
+++ b/docs/demo/Kelvoy可旅_DEMO-V0.3.pptx
@@ -5,28 +5,28 @@
     <p:sldMasterId id="2147483648" r:id="rId1"/>
   </p:sldMasterIdLst>
   <p:notesMasterIdLst>
-    <p:notesMasterId r:id="rId22"/>
+    <p:notesMasterId r:id="rId4"/>
   </p:notesMasterIdLst>
   <p:sldIdLst>
     <p:sldId id="256" r:id="rId3"/>
-    <p:sldId id="257" r:id="rId4"/>
-    <p:sldId id="258" r:id="rId5"/>
-    <p:sldId id="259" r:id="rId6"/>
-    <p:sldId id="260" r:id="rId7"/>
-    <p:sldId id="261" r:id="rId8"/>
-    <p:sldId id="262" r:id="rId9"/>
-    <p:sldId id="263" r:id="rId10"/>
-    <p:sldId id="264" r:id="rId11"/>
-    <p:sldId id="265" r:id="rId12"/>
-    <p:sldId id="266" r:id="rId13"/>
-    <p:sldId id="267" r:id="rId14"/>
-    <p:sldId id="268" r:id="rId15"/>
-    <p:sldId id="269" r:id="rId16"/>
-    <p:sldId id="270" r:id="rId17"/>
-    <p:sldId id="271" r:id="rId18"/>
-    <p:sldId id="272" r:id="rId19"/>
-    <p:sldId id="273" r:id="rId20"/>
-    <p:sldId id="274" r:id="rId21"/>
+    <p:sldId id="257" r:id="rId5"/>
+    <p:sldId id="258" r:id="rId6"/>
+    <p:sldId id="259" r:id="rId7"/>
+    <p:sldId id="260" r:id="rId8"/>
+    <p:sldId id="261" r:id="rId9"/>
+    <p:sldId id="262" r:id="rId10"/>
+    <p:sldId id="263" r:id="rId11"/>
+    <p:sldId id="264" r:id="rId12"/>
+    <p:sldId id="265" r:id="rId13"/>
+    <p:sldId id="266" r:id="rId14"/>
+    <p:sldId id="267" r:id="rId15"/>
+    <p:sldId id="268" r:id="rId16"/>
+    <p:sldId id="269" r:id="rId17"/>
+    <p:sldId id="270" r:id="rId18"/>
+    <p:sldId id="271" r:id="rId19"/>
+    <p:sldId id="272" r:id="rId20"/>
+    <p:sldId id="273" r:id="rId21"/>
+    <p:sldId id="274" r:id="rId22"/>
   </p:sldIdLst>
   <p:sldSz cx="12192000" cy="6858000"/>
   <p:notesSz cx="6858000" cy="12192000"/>
@@ -243,6 +243,2875 @@
     </a:lvl9pPr>
   </p:notesStyle>
 </p:notesMaster>
+</file>
+
+<file path=ppt/notesSlides/notesSlide1.xml><?xml version="1.0" encoding="utf-8"?>
+<p:notes xmlns:a="http://schemas.openxmlformats.org/drawingml/2006/main" xmlns:r="http://schemas.openxmlformats.org/officeDocument/2006/relationships" xmlns:p="http://schemas.openxmlformats.org/presentationml/2006/main">
+  <p:cSld>
+    <p:spTree>
+      <p:nvGrpSpPr>
+        <p:cNvPr id="1" name=""/>
+        <p:cNvGrpSpPr/>
+        <p:nvPr/>
+      </p:nvGrpSpPr>
+      <p:grpSpPr/>
+      <p:sp>
+        <p:nvSpPr>
+          <p:cNvPr id="2" name="文本占位符 1"/>
+          <p:cNvSpPr>
+            <a:spLocks noGrp="1"/>
+          </p:cNvSpPr>
+          <p:nvPr>
+            <p:ph type="body" sz="quarter"/>
+          </p:nvPr>
+        </p:nvSpPr>
+        <p:spPr>
+          <a:xfrm>
+            <a:off x="662016" y="5242000"/>
+            <a:ext cx="5296132" cy="4288909"/>
+          </a:xfrm>
+          <a:prstGeom prst="rect">
+            <a:avLst/>
+          </a:prstGeom>
+        </p:spPr>
+        <p:txBody>
+          <a:bodyPr/>
+          <a:p>
+            <a:r>
+              <a:rPr lang="zh-CN" altLang="en-US"/>
+              <a:t>各位评委老师、</a:t>
+            </a:r>
+            <a:r>
+              <a:rPr lang="en-US" altLang="zh-CN"/>
+              <a:t>NVIDIA</a:t>
+            </a:r>
+            <a:r>
+              <a:rPr lang="zh-CN" altLang="en-US"/>
+              <a:t>主办方的伙伴、各位参赛同行，大家好！我是可旅</a:t>
+            </a:r>
+            <a:r>
+              <a:rPr lang="en-US" altLang="zh-CN"/>
+              <a:t>Kelvoy</a:t>
+            </a:r>
+            <a:r>
+              <a:rPr lang="zh-CN" altLang="en-US"/>
+              <a:t>团队的成员，今天非常荣幸能在第三届</a:t>
+            </a:r>
+            <a:r>
+              <a:rPr lang="en-US" altLang="zh-CN"/>
+              <a:t>NVIDIA DGX Spark</a:t>
+            </a:r>
+            <a:r>
+              <a:rPr lang="zh-CN" altLang="en-US"/>
+              <a:t>黑客松，给大家展示我们的参赛项目</a:t>
+            </a:r>
+            <a:r>
+              <a:rPr lang="en-US" altLang="zh-CN"/>
+              <a:t>——Kelvoy</a:t>
+            </a:r>
+            <a:r>
+              <a:rPr lang="zh-CN" altLang="en-US"/>
+              <a:t>可旅</a:t>
+            </a:r>
+            <a:r>
+              <a:rPr lang="en-US" altLang="zh-CN"/>
+              <a:t>AI</a:t>
+            </a:r>
+            <a:r>
+              <a:rPr lang="zh-CN" altLang="en-US"/>
+              <a:t>旅行</a:t>
+            </a:r>
+            <a:r>
+              <a:rPr lang="en-US" altLang="zh-CN"/>
+              <a:t>Vlog</a:t>
+            </a:r>
+            <a:r>
+              <a:rPr lang="zh-CN" altLang="en-US"/>
+              <a:t>生产工作台。</a:t>
+            </a:r>
+            <a:r>
+              <a:rPr lang="en-US" altLang="zh-CN"/>
+              <a:t>
+</a:t>
+            </a:r>
+            <a:r>
+              <a:rPr lang="zh-CN" altLang="en-US"/>
+              <a:t>我们这款产品专为旅行内容持续生产打造，只需选一个固定人设角色、选定一个真实目的地，就能自动生成适配</a:t>
+            </a:r>
+            <a:r>
+              <a:rPr lang="en-US" altLang="zh-CN"/>
+              <a:t>9:16</a:t>
+            </a:r>
+            <a:r>
+              <a:rPr lang="zh-CN" altLang="en-US"/>
+              <a:t>或</a:t>
+            </a:r>
+            <a:r>
+              <a:rPr lang="en-US" altLang="zh-CN"/>
+              <a:t>16:9</a:t>
+            </a:r>
+            <a:r>
+              <a:rPr lang="zh-CN" altLang="en-US"/>
+              <a:t>画幅的旅行</a:t>
+            </a:r>
+            <a:r>
+              <a:rPr lang="en-US" altLang="zh-CN"/>
+              <a:t>Vlog</a:t>
+            </a:r>
+            <a:r>
+              <a:rPr lang="zh-CN" altLang="en-US"/>
+              <a:t>，全程设置三个人工审核点把控质量，全流程都可以跑在本地</a:t>
+            </a:r>
+            <a:r>
+              <a:rPr lang="en-US" altLang="zh-CN"/>
+              <a:t>DGX Spark</a:t>
+            </a:r>
+            <a:r>
+              <a:rPr lang="zh-CN" altLang="en-US"/>
+              <a:t>上。接下来我就从需求问题开始，逐步为大家介绍我们的产品，最后带来完整的现场演示。</a:t>
+            </a:r>
+            <a:endParaRPr lang="zh-CN" altLang="en-US"/>
+          </a:p>
+        </p:txBody>
+      </p:sp>
+    </p:spTree>
+  </p:cSld>
+  <p:clrMapOvr>
+    <a:masterClrMapping/>
+  </p:clrMapOvr>
+</p:notes>
+</file>
+
+<file path=ppt/notesSlides/notesSlide10.xml><?xml version="1.0" encoding="utf-8"?>
+<p:notes xmlns:a="http://schemas.openxmlformats.org/drawingml/2006/main" xmlns:r="http://schemas.openxmlformats.org/officeDocument/2006/relationships" xmlns:p="http://schemas.openxmlformats.org/presentationml/2006/main">
+  <p:cSld>
+    <p:spTree>
+      <p:nvGrpSpPr>
+        <p:cNvPr id="1" name=""/>
+        <p:cNvGrpSpPr/>
+        <p:nvPr/>
+      </p:nvGrpSpPr>
+      <p:grpSpPr/>
+      <p:sp>
+        <p:nvSpPr>
+          <p:cNvPr id="2" name="文本占位符 1"/>
+          <p:cNvSpPr>
+            <a:spLocks noGrp="1"/>
+          </p:cNvSpPr>
+          <p:nvPr>
+            <p:ph type="body" sz="quarter"/>
+          </p:nvPr>
+        </p:nvSpPr>
+        <p:spPr>
+          <a:xfrm>
+            <a:off x="662016" y="5242000"/>
+            <a:ext cx="5296132" cy="4288909"/>
+          </a:xfrm>
+          <a:prstGeom prst="rect">
+            <a:avLst/>
+          </a:prstGeom>
+        </p:spPr>
+        <p:txBody>
+          <a:bodyPr/>
+          <a:p>
+            <a:r>
+              <a:rPr lang="zh-CN" altLang="en-US"/>
+              <a:t>看完整体产品架构和流程后，我们来看可旅</a:t>
+            </a:r>
+            <a:r>
+              <a:rPr lang="en-US" altLang="zh-CN"/>
+              <a:t>Kelvoy</a:t>
+            </a:r>
+            <a:r>
+              <a:rPr lang="zh-CN" altLang="en-US"/>
+              <a:t>最核心的剪辑规则设计，这套规则完全贴合当下短视频用户的观看习惯。</a:t>
+            </a:r>
+            <a:r>
+              <a:rPr lang="en-US" altLang="zh-CN"/>
+              <a:t>
+</a:t>
+            </a:r>
+            <a:r>
+              <a:rPr lang="zh-CN" altLang="en-US"/>
+              <a:t>可旅采用每镜严格</a:t>
+            </a:r>
+            <a:r>
+              <a:rPr lang="en-US" altLang="zh-CN"/>
+              <a:t>1</a:t>
+            </a:r>
+            <a:r>
+              <a:rPr lang="zh-CN" altLang="en-US"/>
+              <a:t>秒、</a:t>
+            </a:r>
+            <a:r>
+              <a:rPr lang="en-US" altLang="zh-CN"/>
+              <a:t>30</a:t>
+            </a:r>
+            <a:r>
+              <a:rPr lang="zh-CN" altLang="en-US"/>
+              <a:t>帧</a:t>
+            </a:r>
+            <a:r>
+              <a:rPr lang="en-US" altLang="zh-CN"/>
+              <a:t>@30fps</a:t>
+            </a:r>
+            <a:r>
+              <a:rPr lang="zh-CN" altLang="en-US"/>
+              <a:t>的标准化设置，切点精准对齐</a:t>
+            </a:r>
+            <a:r>
+              <a:rPr lang="en-US" altLang="zh-CN"/>
+              <a:t>1/30</a:t>
+            </a:r>
+            <a:r>
+              <a:rPr lang="zh-CN" altLang="en-US"/>
+              <a:t>秒的整数帧窗口，系统自动校验选段不会超出片尾范围。相邻镜头前后各设置</a:t>
+            </a:r>
+            <a:r>
+              <a:rPr lang="en-US" altLang="zh-CN"/>
+              <a:t>2</a:t>
+            </a:r>
+            <a:r>
+              <a:rPr lang="zh-CN" altLang="en-US"/>
+              <a:t>帧的片内淡入淡出转场，避免画面跳转过于突兀，保证整体观看流畅度。</a:t>
+            </a:r>
+            <a:r>
+              <a:rPr lang="en-US" altLang="zh-CN"/>
+              <a:t>
+</a:t>
+            </a:r>
+            <a:r>
+              <a:rPr lang="zh-CN" altLang="en-US"/>
+              <a:t>字幕默认开启，直接烧录到每一秒的镜头窗口中，片头的自然偏移由多镜头拼接自动生成，不需要额外手动调整。片头片尾默认关闭，用户可在合成设置中自行添加，配乐仅覆盖全片，不会改动已经设置好的切点位置。</a:t>
+            </a:r>
+            <a:r>
+              <a:rPr lang="en-US" altLang="zh-CN"/>
+              <a:t>AI</a:t>
+            </a:r>
+            <a:r>
+              <a:rPr lang="zh-CN" altLang="en-US"/>
+              <a:t>标识同时通过右下角半透明水印和文件元数据双重标注，完全符合</a:t>
+            </a:r>
+            <a:r>
+              <a:rPr lang="en-US" altLang="zh-CN"/>
+              <a:t>2025</a:t>
+            </a:r>
+            <a:r>
+              <a:rPr lang="zh-CN" altLang="en-US"/>
+              <a:t>年</a:t>
+            </a:r>
+            <a:r>
+              <a:rPr lang="en-US" altLang="zh-CN"/>
+              <a:t>9</a:t>
+            </a:r>
+            <a:r>
+              <a:rPr lang="zh-CN" altLang="en-US"/>
+              <a:t>月即将施行的</a:t>
+            </a:r>
+            <a:r>
+              <a:rPr lang="en-US" altLang="zh-CN"/>
+              <a:t>AI</a:t>
+            </a:r>
+            <a:r>
+              <a:rPr lang="zh-CN" altLang="en-US"/>
+              <a:t>生成内容标识规定。</a:t>
+            </a:r>
+            <a:r>
+              <a:rPr lang="en-US" altLang="zh-CN"/>
+              <a:t>
+</a:t>
+            </a:r>
+            <a:r>
+              <a:rPr lang="zh-CN" altLang="en-US"/>
+              <a:t>这套标准化剪辑规则打造出明快紧凑的节奏，完美适配抖音、小红书等平台</a:t>
+            </a:r>
+            <a:r>
+              <a:rPr lang="en-US" altLang="zh-CN"/>
+              <a:t>9:16</a:t>
+            </a:r>
+            <a:r>
+              <a:rPr lang="zh-CN" altLang="en-US"/>
+              <a:t>竖屏信息流的观看习惯，用户拿到成片就能直接分享。</a:t>
+            </a:r>
+            <a:endParaRPr lang="zh-CN" altLang="en-US"/>
+          </a:p>
+        </p:txBody>
+      </p:sp>
+    </p:spTree>
+  </p:cSld>
+  <p:clrMapOvr>
+    <a:masterClrMapping/>
+  </p:clrMapOvr>
+</p:notes>
+</file>
+
+<file path=ppt/notesSlides/notesSlide11.xml><?xml version="1.0" encoding="utf-8"?>
+<p:notes xmlns:a="http://schemas.openxmlformats.org/drawingml/2006/main" xmlns:r="http://schemas.openxmlformats.org/officeDocument/2006/relationships" xmlns:p="http://schemas.openxmlformats.org/presentationml/2006/main">
+  <p:cSld>
+    <p:spTree>
+      <p:nvGrpSpPr>
+        <p:cNvPr id="1" name=""/>
+        <p:cNvGrpSpPr/>
+        <p:nvPr/>
+      </p:nvGrpSpPr>
+      <p:grpSpPr/>
+      <p:sp>
+        <p:nvSpPr>
+          <p:cNvPr id="2" name="文本占位符 1"/>
+          <p:cNvSpPr>
+            <a:spLocks noGrp="1"/>
+          </p:cNvSpPr>
+          <p:nvPr>
+            <p:ph type="body" sz="quarter"/>
+          </p:nvPr>
+        </p:nvSpPr>
+        <p:spPr>
+          <a:xfrm>
+            <a:off x="662016" y="5242000"/>
+            <a:ext cx="5296132" cy="4288909"/>
+          </a:xfrm>
+          <a:prstGeom prst="rect">
+            <a:avLst/>
+          </a:prstGeom>
+        </p:spPr>
+        <p:txBody>
+          <a:bodyPr/>
+          <a:p>
+            <a:r>
+              <a:rPr lang="zh-CN" altLang="en-US"/>
+              <a:t>介绍完产品的核心形态与体验设计，接下来我们拆解产品背后的技术与工程方案，看清可旅</a:t>
+            </a:r>
+            <a:r>
+              <a:rPr lang="en-US" altLang="zh-CN"/>
+              <a:t>Kelvoy</a:t>
+            </a:r>
+            <a:r>
+              <a:rPr lang="zh-CN" altLang="en-US"/>
+              <a:t>如何稳定实现</a:t>
+            </a:r>
+            <a:r>
+              <a:rPr lang="en-US" altLang="zh-CN"/>
+              <a:t>AI</a:t>
+            </a:r>
+            <a:r>
+              <a:rPr lang="zh-CN" altLang="en-US"/>
+              <a:t>旅行</a:t>
+            </a:r>
+            <a:r>
+              <a:rPr lang="en-US" altLang="zh-CN"/>
+              <a:t>Vlog</a:t>
+            </a:r>
+            <a:r>
+              <a:rPr lang="zh-CN" altLang="en-US"/>
+              <a:t>的批量生产。</a:t>
+            </a:r>
+            <a:r>
+              <a:rPr lang="en-US" altLang="zh-CN"/>
+              <a:t>
+</a:t>
+            </a:r>
+            <a:r>
+              <a:rPr lang="zh-CN" altLang="en-US"/>
+              <a:t>可旅选择搭建本地优先的单机闭环架构，把</a:t>
+            </a:r>
+            <a:r>
+              <a:rPr lang="en-US" altLang="zh-CN"/>
+              <a:t>SQLite</a:t>
+            </a:r>
+            <a:r>
+              <a:rPr lang="zh-CN" altLang="en-US"/>
+              <a:t>作为全系统唯一真数据源，这套架构支撑起敢在现场直接重试的工程底座，大幅降低了系统运维与数据一致性的成本。</a:t>
+            </a:r>
+            <a:r>
+              <a:rPr lang="en-US" altLang="zh-CN"/>
+              <a:t>
+</a:t>
+            </a:r>
+            <a:r>
+              <a:rPr lang="zh-CN" altLang="en-US"/>
+              <a:t>整套架构拆解为三个核心设计方向，每个方向对应具体落地方案。第一，搭建全链路单机闭环，前端用</a:t>
+            </a:r>
+            <a:r>
+              <a:rPr lang="en-US" altLang="zh-CN"/>
+              <a:t>React+Vite</a:t>
+            </a:r>
+            <a:r>
+              <a:rPr lang="zh-CN" altLang="en-US"/>
+              <a:t>搭建交互界面，后端整合</a:t>
+            </a:r>
+            <a:r>
+              <a:rPr lang="en-US" altLang="zh-CN"/>
+              <a:t>Hono</a:t>
+            </a:r>
+            <a:r>
+              <a:rPr lang="zh-CN" altLang="en-US"/>
+              <a:t>、</a:t>
+            </a:r>
+            <a:r>
+              <a:rPr lang="en-US" altLang="zh-CN"/>
+              <a:t>SQLite</a:t>
+            </a:r>
+            <a:r>
+              <a:rPr lang="zh-CN" altLang="en-US"/>
+              <a:t>、任务</a:t>
+            </a:r>
+            <a:r>
+              <a:rPr lang="en-US" altLang="zh-CN"/>
+              <a:t>Worker</a:t>
+            </a:r>
+            <a:r>
+              <a:rPr lang="zh-CN" altLang="en-US"/>
+              <a:t>与</a:t>
+            </a:r>
+            <a:r>
+              <a:rPr lang="en-US" altLang="zh-CN"/>
+              <a:t>ComfyUI</a:t>
+            </a:r>
+            <a:r>
+              <a:rPr lang="zh-CN" altLang="en-US"/>
+              <a:t>推理框架，所有核心逻辑都能在单节点运行。第二，分层对接推理能力，给每个生成环节单独设置接口，核心推理任务优先走本地部署模型，遇到算力不足或本地生成失败的情况，自动切换到第三方</a:t>
+            </a:r>
+            <a:r>
+              <a:rPr lang="en-US" altLang="zh-CN"/>
+              <a:t>API</a:t>
+            </a:r>
+            <a:r>
+              <a:rPr lang="zh-CN" altLang="en-US"/>
+              <a:t>溢出，保障生产流程不中断。第三，设计动作级计价体系，对每个生成动作做原子化的积分预留、结算与释放，既精准统计用量，也能在生成失败时自动释放额度，避免资源浪费。</a:t>
+            </a:r>
+            <a:r>
+              <a:rPr lang="en-US" altLang="zh-CN"/>
+              <a:t>
+</a:t>
+            </a:r>
+            <a:r>
+              <a:rPr lang="zh-CN" altLang="en-US"/>
+              <a:t>后续我们会展开讲解每个设计方向的具体落地细节，帮大家理解这套架构的优势。</a:t>
+            </a:r>
+            <a:endParaRPr lang="zh-CN" altLang="en-US"/>
+          </a:p>
+        </p:txBody>
+      </p:sp>
+    </p:spTree>
+  </p:cSld>
+  <p:clrMapOvr>
+    <a:masterClrMapping/>
+  </p:clrMapOvr>
+</p:notes>
+</file>
+
+<file path=ppt/notesSlides/notesSlide12.xml><?xml version="1.0" encoding="utf-8"?>
+<p:notes xmlns:a="http://schemas.openxmlformats.org/drawingml/2006/main" xmlns:r="http://schemas.openxmlformats.org/officeDocument/2006/relationships" xmlns:p="http://schemas.openxmlformats.org/presentationml/2006/main">
+  <p:cSld>
+    <p:spTree>
+      <p:nvGrpSpPr>
+        <p:cNvPr id="1" name=""/>
+        <p:cNvGrpSpPr/>
+        <p:nvPr/>
+      </p:nvGrpSpPr>
+      <p:grpSpPr/>
+      <p:sp>
+        <p:nvSpPr>
+          <p:cNvPr id="2" name="文本占位符 1"/>
+          <p:cNvSpPr>
+            <a:spLocks noGrp="1"/>
+          </p:cNvSpPr>
+          <p:nvPr>
+            <p:ph type="body" sz="quarter"/>
+          </p:nvPr>
+        </p:nvSpPr>
+        <p:spPr>
+          <a:xfrm>
+            <a:off x="662016" y="5242000"/>
+            <a:ext cx="5296132" cy="4288909"/>
+          </a:xfrm>
+          <a:prstGeom prst="rect">
+            <a:avLst/>
+          </a:prstGeom>
+        </p:spPr>
+        <p:txBody>
+          <a:bodyPr/>
+          <a:p>
+            <a:r>
+              <a:rPr lang="zh-CN" altLang="en-US"/>
+              <a:t>可旅产品选择本地优先的单机闭环架构，把</a:t>
+            </a:r>
+            <a:r>
+              <a:rPr lang="en-US" altLang="zh-CN"/>
+              <a:t>SQLite</a:t>
+            </a:r>
+            <a:r>
+              <a:rPr lang="zh-CN" altLang="en-US"/>
+              <a:t>作为唯一真源，这套架构完全服务于</a:t>
+            </a:r>
+            <a:r>
+              <a:rPr lang="en-US" altLang="zh-CN"/>
+              <a:t>AI</a:t>
+            </a:r>
+            <a:r>
+              <a:rPr lang="zh-CN" altLang="en-US"/>
+              <a:t>旅行</a:t>
+            </a:r>
+            <a:r>
+              <a:rPr lang="en-US" altLang="zh-CN"/>
+              <a:t>Vlog</a:t>
+            </a:r>
+            <a:r>
+              <a:rPr lang="zh-CN" altLang="en-US"/>
+              <a:t>生产的核心场景。</a:t>
+            </a:r>
+            <a:r>
+              <a:rPr lang="en-US" altLang="zh-CN"/>
+              <a:t>
+</a:t>
+            </a:r>
+            <a:r>
+              <a:rPr lang="zh-CN" altLang="en-US"/>
+              <a:t>最上层是面向用户的</a:t>
+            </a:r>
+            <a:r>
+              <a:rPr lang="en-US" altLang="zh-CN"/>
+              <a:t>WEB</a:t>
+            </a:r>
+            <a:r>
+              <a:rPr lang="zh-CN" altLang="en-US"/>
+              <a:t>端，基于</a:t>
+            </a:r>
+            <a:r>
+              <a:rPr lang="en-US" altLang="zh-CN"/>
+              <a:t>React + Vite</a:t>
+            </a:r>
+            <a:r>
+              <a:rPr lang="zh-CN" altLang="en-US"/>
+              <a:t>搭建，覆盖官网登录、项目创建、内容审核、用量查询、作品分享全流程用户操作。</a:t>
+            </a:r>
+            <a:r>
+              <a:rPr lang="en-US" altLang="zh-CN"/>
+              <a:t>WEB</a:t>
+            </a:r>
+            <a:r>
+              <a:rPr lang="zh-CN" altLang="en-US"/>
+              <a:t>层通过运行在</a:t>
+            </a:r>
+            <a:r>
+              <a:rPr lang="en-US" altLang="zh-CN"/>
+              <a:t>3000</a:t>
+            </a:r>
+            <a:r>
+              <a:rPr lang="zh-CN" altLang="en-US"/>
+              <a:t>端口的</a:t>
+            </a:r>
+            <a:r>
+              <a:rPr lang="en-US" altLang="zh-CN"/>
+              <a:t>Hono</a:t>
+            </a:r>
+            <a:r>
+              <a:rPr lang="zh-CN" altLang="en-US"/>
+              <a:t>框架提供</a:t>
+            </a:r>
+            <a:r>
+              <a:rPr lang="en-US" altLang="zh-CN"/>
+              <a:t>API</a:t>
+            </a:r>
+            <a:r>
+              <a:rPr lang="zh-CN" altLang="en-US"/>
+              <a:t>接口，承接前端所有操作请求。</a:t>
+            </a:r>
+            <a:r>
+              <a:rPr lang="en-US" altLang="zh-CN"/>
+              <a:t>
+</a:t>
+            </a:r>
+            <a:r>
+              <a:rPr lang="zh-CN" altLang="en-US"/>
+              <a:t>核心数据层统一存储在</a:t>
+            </a:r>
+            <a:r>
+              <a:rPr lang="en-US" altLang="zh-CN"/>
+              <a:t>SQLite</a:t>
+            </a:r>
+            <a:r>
+              <a:rPr lang="zh-CN" altLang="en-US"/>
+              <a:t>中，项目、角色、目的地、模板、任务、积分等所有核心数据都在这里沉淀，彻底规避多数据源带来的一致性风险。消费任务由独立的</a:t>
+            </a:r>
+            <a:r>
+              <a:rPr lang="en-US" altLang="zh-CN"/>
+              <a:t>worker</a:t>
+            </a:r>
+            <a:r>
+              <a:rPr lang="zh-CN" altLang="en-US"/>
+              <a:t>模块承担，负责任务租约管理、生成适配、产物归档、</a:t>
+            </a:r>
+            <a:r>
+              <a:rPr lang="en-US" altLang="zh-CN"/>
+              <a:t>ffmpeg</a:t>
+            </a:r>
+            <a:r>
+              <a:rPr lang="zh-CN" altLang="en-US"/>
+              <a:t>视频合成和积分结算全流程。推理层对接</a:t>
+            </a:r>
+            <a:r>
+              <a:rPr lang="en-US" altLang="zh-CN"/>
+              <a:t>Qwen-Image 2.1</a:t>
+            </a:r>
+            <a:r>
+              <a:rPr lang="zh-CN" altLang="en-US"/>
+              <a:t>和</a:t>
+            </a:r>
+            <a:r>
+              <a:rPr lang="en-US" altLang="zh-CN"/>
+              <a:t>MiniMax H3</a:t>
+            </a:r>
+            <a:r>
+              <a:rPr lang="zh-CN" altLang="en-US"/>
+              <a:t>两个核心模型，通过</a:t>
+            </a:r>
+            <a:r>
+              <a:rPr lang="en-US" altLang="zh-CN"/>
+              <a:t>comfyui-bridge</a:t>
+            </a:r>
+            <a:r>
+              <a:rPr lang="zh-CN" altLang="en-US"/>
+              <a:t>工作流完成图生图、图生视频的生成任务。</a:t>
+            </a:r>
+            <a:r>
+              <a:rPr lang="en-US" altLang="zh-CN"/>
+              <a:t>
+</a:t>
+            </a:r>
+            <a:r>
+              <a:rPr lang="zh-CN" altLang="en-US"/>
+              <a:t>这套架构明确六条不可触碰的红线，砍掉不必要的中间件，避免复杂内部调用，锁定</a:t>
+            </a:r>
+            <a:r>
+              <a:rPr lang="en-US" altLang="zh-CN"/>
+              <a:t>ffmpeg</a:t>
+            </a:r>
+            <a:r>
+              <a:rPr lang="zh-CN" altLang="en-US"/>
+              <a:t>的运行位置，支持模型灵活替换，规范产物存储路径，预留后续拆分扩展空间。最终实现单机器单数据源部署，把运维复杂度和数据一致性风险降到最低。</a:t>
+            </a:r>
+            <a:endParaRPr lang="zh-CN" altLang="en-US"/>
+          </a:p>
+        </p:txBody>
+      </p:sp>
+    </p:spTree>
+  </p:cSld>
+  <p:clrMapOvr>
+    <a:masterClrMapping/>
+  </p:clrMapOvr>
+</p:notes>
+</file>
+
+<file path=ppt/notesSlides/notesSlide13.xml><?xml version="1.0" encoding="utf-8"?>
+<p:notes xmlns:a="http://schemas.openxmlformats.org/drawingml/2006/main" xmlns:r="http://schemas.openxmlformats.org/officeDocument/2006/relationships" xmlns:p="http://schemas.openxmlformats.org/presentationml/2006/main">
+  <p:cSld>
+    <p:spTree>
+      <p:nvGrpSpPr>
+        <p:cNvPr id="1" name=""/>
+        <p:cNvGrpSpPr/>
+        <p:nvPr/>
+      </p:nvGrpSpPr>
+      <p:grpSpPr/>
+      <p:sp>
+        <p:nvSpPr>
+          <p:cNvPr id="2" name="文本占位符 1"/>
+          <p:cNvSpPr>
+            <a:spLocks noGrp="1"/>
+          </p:cNvSpPr>
+          <p:nvPr>
+            <p:ph type="body" sz="quarter"/>
+          </p:nvPr>
+        </p:nvSpPr>
+        <p:spPr>
+          <a:xfrm>
+            <a:off x="662016" y="5242000"/>
+            <a:ext cx="5296132" cy="4288909"/>
+          </a:xfrm>
+          <a:prstGeom prst="rect">
+            <a:avLst/>
+          </a:prstGeom>
+        </p:spPr>
+        <p:txBody>
+          <a:bodyPr/>
+          <a:p>
+            <a:r>
+              <a:rPr lang="zh-CN" altLang="en-US"/>
+              <a:t>我们这套生成框架采用模块化设计思路，每个生产环节独立配置适配接口，核心计算优先运行在本地，超出本地负载或本地调用失败时，自动切换到第三方</a:t>
+            </a:r>
+            <a:r>
+              <a:rPr lang="en-US" altLang="zh-CN"/>
+              <a:t>API</a:t>
+            </a:r>
+            <a:r>
+              <a:rPr lang="zh-CN" altLang="en-US"/>
+              <a:t>服务完成，兼顾运行成本与生成稳定性。</a:t>
+            </a:r>
+            <a:r>
+              <a:rPr lang="en-US" altLang="zh-CN"/>
+              <a:t>
+</a:t>
+            </a:r>
+            <a:r>
+              <a:rPr lang="zh-CN" altLang="en-US"/>
+              <a:t>脚本生成环节接入字节跳动的阶跃星辰</a:t>
+            </a:r>
+            <a:r>
+              <a:rPr lang="en-US" altLang="zh-CN"/>
+              <a:t>API</a:t>
+            </a:r>
+            <a:r>
+              <a:rPr lang="zh-CN" altLang="en-US"/>
+              <a:t>，输入项目简介和目的地资料包，就能直接输出</a:t>
+            </a:r>
+            <a:r>
+              <a:rPr lang="en-US" altLang="zh-CN"/>
+              <a:t>24</a:t>
+            </a:r>
+            <a:r>
+              <a:rPr lang="zh-CN" altLang="en-US"/>
+              <a:t>到</a:t>
+            </a:r>
+            <a:r>
+              <a:rPr lang="en-US" altLang="zh-CN"/>
+              <a:t>30</a:t>
+            </a:r>
+            <a:r>
+              <a:rPr lang="zh-CN" altLang="en-US"/>
+              <a:t>镜的结构化</a:t>
+            </a:r>
+            <a:r>
+              <a:rPr lang="en-US" altLang="zh-CN"/>
+              <a:t>JSON</a:t>
+            </a:r>
+            <a:r>
+              <a:rPr lang="zh-CN" altLang="en-US"/>
+              <a:t>脚本，还支持用户根据创作需求调整优化重生成。图像生成环节，我们选用本地部署的通义千问</a:t>
+            </a:r>
+            <a:r>
+              <a:rPr lang="en-US" altLang="zh-CN"/>
+              <a:t>Image 2.1</a:t>
+            </a:r>
+            <a:r>
+              <a:rPr lang="zh-CN" altLang="en-US"/>
+              <a:t>大模型，支持单参考生成角色图、双参考同时生成角色和地标图，每镜自动输出</a:t>
+            </a:r>
+            <a:r>
+              <a:rPr lang="en-US" altLang="zh-CN"/>
+              <a:t>1</a:t>
+            </a:r>
+            <a:r>
+              <a:rPr lang="zh-CN" altLang="en-US"/>
+              <a:t>到</a:t>
+            </a:r>
+            <a:r>
+              <a:rPr lang="en-US" altLang="zh-CN"/>
+              <a:t>3</a:t>
+            </a:r>
+            <a:r>
+              <a:rPr lang="zh-CN" altLang="en-US"/>
+              <a:t>张候选图供人工筛选。视频生成环节，在本地部署</a:t>
+            </a:r>
+            <a:r>
+              <a:rPr lang="en-US" altLang="zh-CN"/>
+              <a:t>MiniMax H3</a:t>
+            </a:r>
+            <a:r>
+              <a:rPr lang="zh-CN" altLang="en-US"/>
+              <a:t>模型，同时支持默认路径的双参考直出视频，以及精修路径的关键帧图生视频，为每段视频预留充足的生成预算，保证输出效果。</a:t>
+            </a:r>
+            <a:r>
+              <a:rPr lang="en-US" altLang="zh-CN"/>
+              <a:t>
+</a:t>
+            </a:r>
+            <a:r>
+              <a:rPr lang="zh-CN" altLang="en-US"/>
+              <a:t>为了避免本地服务故障影响项目进度，我们配置了可灵和即梦</a:t>
+            </a:r>
+            <a:r>
+              <a:rPr lang="en-US" altLang="zh-CN"/>
+              <a:t>API</a:t>
+            </a:r>
+            <a:r>
+              <a:rPr lang="zh-CN" altLang="en-US"/>
+              <a:t>作为溢出通道，本地重试不超过</a:t>
+            </a:r>
+            <a:r>
+              <a:rPr lang="en-US" altLang="zh-CN"/>
+              <a:t>2</a:t>
+            </a:r>
+            <a:r>
+              <a:rPr lang="zh-CN" altLang="en-US"/>
+              <a:t>次失败后自动切换，本地排队超出阈值也会直接转溢出通道，不浪费用户等待时间。配乐环节从商用授权曲库按风格检索匹配，当前版本暂不支持</a:t>
+            </a:r>
+            <a:r>
+              <a:rPr lang="en-US" altLang="zh-CN"/>
+              <a:t>AI</a:t>
+            </a:r>
+            <a:r>
+              <a:rPr lang="zh-CN" altLang="en-US"/>
+              <a:t>生成音乐。最终合成环节由本地</a:t>
+            </a:r>
+            <a:r>
+              <a:rPr lang="en-US" altLang="zh-CN"/>
+              <a:t>Worker</a:t>
+            </a:r>
+            <a:r>
+              <a:rPr lang="zh-CN" altLang="en-US"/>
+              <a:t>调用</a:t>
+            </a:r>
+            <a:r>
+              <a:rPr lang="en-US" altLang="zh-CN"/>
+              <a:t>FFmpeg</a:t>
+            </a:r>
+            <a:r>
+              <a:rPr lang="zh-CN" altLang="en-US"/>
+              <a:t>完成，统一处理帧对齐、调色、字幕、转场、</a:t>
+            </a:r>
+            <a:r>
+              <a:rPr lang="en-US" altLang="zh-CN"/>
+              <a:t>AI</a:t>
+            </a:r>
+            <a:r>
+              <a:rPr lang="zh-CN" altLang="en-US"/>
+              <a:t>标识和封装输出。</a:t>
+            </a:r>
+            <a:r>
+              <a:rPr lang="en-US" altLang="zh-CN"/>
+              <a:t>
+</a:t>
+            </a:r>
+            <a:r>
+              <a:rPr lang="zh-CN" altLang="en-US"/>
+              <a:t>所有生成调用都会完整记录供应商、模型版本、随机种子、参考图哈希和对应费用，最终按项目汇总生成完整成本报告，方便团队核算资源消耗。</a:t>
+            </a:r>
+            <a:endParaRPr lang="zh-CN" altLang="en-US"/>
+          </a:p>
+        </p:txBody>
+      </p:sp>
+    </p:spTree>
+  </p:cSld>
+  <p:clrMapOvr>
+    <a:masterClrMapping/>
+  </p:clrMapOvr>
+</p:notes>
+</file>
+
+<file path=ppt/notesSlides/notesSlide14.xml><?xml version="1.0" encoding="utf-8"?>
+<p:notes xmlns:a="http://schemas.openxmlformats.org/drawingml/2006/main" xmlns:r="http://schemas.openxmlformats.org/officeDocument/2006/relationships" xmlns:p="http://schemas.openxmlformats.org/presentationml/2006/main">
+  <p:cSld>
+    <p:spTree>
+      <p:nvGrpSpPr>
+        <p:cNvPr id="1" name=""/>
+        <p:cNvGrpSpPr/>
+        <p:nvPr/>
+      </p:nvGrpSpPr>
+      <p:grpSpPr/>
+      <p:sp>
+        <p:nvSpPr>
+          <p:cNvPr id="2" name="文本占位符 1"/>
+          <p:cNvSpPr>
+            <a:spLocks noGrp="1"/>
+          </p:cNvSpPr>
+          <p:nvPr>
+            <p:ph type="body" sz="quarter"/>
+          </p:nvPr>
+        </p:nvSpPr>
+        <p:spPr>
+          <a:xfrm>
+            <a:off x="662016" y="5242000"/>
+            <a:ext cx="5296132" cy="4288909"/>
+          </a:xfrm>
+          <a:prstGeom prst="rect">
+            <a:avLst/>
+          </a:prstGeom>
+        </p:spPr>
+        <p:txBody>
+          <a:bodyPr/>
+          <a:p>
+            <a:r>
+              <a:rPr lang="zh-CN" altLang="en-US"/>
+              <a:t>可旅作为现场可用的</a:t>
+            </a:r>
+            <a:r>
+              <a:rPr lang="en-US" altLang="zh-CN"/>
+              <a:t>AI</a:t>
+            </a:r>
+            <a:r>
+              <a:rPr lang="zh-CN" altLang="en-US"/>
+              <a:t>旅行</a:t>
+            </a:r>
+            <a:r>
+              <a:rPr lang="en-US" altLang="zh-CN"/>
+              <a:t>Vlog</a:t>
+            </a:r>
+            <a:r>
+              <a:rPr lang="zh-CN" altLang="en-US"/>
+              <a:t>生产工具，核心需求就是支持用户随时在旅行现场操作、重试，我们围绕这个需求设计了六项工程机制，全方位降低重试的成本与风险。</a:t>
+            </a:r>
+            <a:r>
+              <a:rPr lang="en-US" altLang="zh-CN"/>
+              <a:t>
+</a:t>
+            </a:r>
+            <a:r>
+              <a:rPr lang="zh-CN" altLang="en-US"/>
+              <a:t>第一项任务租约机制解决意外宕机丢任务问题，租约到期未完成的任务会自动被队列回收重新领取，哪怕</a:t>
+            </a:r>
+            <a:r>
+              <a:rPr lang="en-US" altLang="zh-CN"/>
+              <a:t>Worker</a:t>
+            </a:r>
+            <a:r>
+              <a:rPr lang="zh-CN" altLang="en-US"/>
+              <a:t>意外重启，也不会丢失任何任务。第二项事务化结果提交，把任务结果、项目状态、积分结算三个操作绑定成一个事务统一落库，保证数据状态始终一致，不会出现</a:t>
+            </a:r>
+            <a:r>
+              <a:rPr lang="en-US" altLang="zh-CN"/>
+              <a:t>partial failure</a:t>
+            </a:r>
+            <a:r>
+              <a:rPr lang="zh-CN" altLang="en-US"/>
+              <a:t>的脏数据。</a:t>
+            </a:r>
+            <a:r>
+              <a:rPr lang="en-US" altLang="zh-CN"/>
+              <a:t>
+</a:t>
+            </a:r>
+            <a:r>
+              <a:rPr lang="zh-CN" altLang="en-US"/>
+              <a:t>第三项失败重试复用候选，保留已经成功生成的候选文件，沿用原</a:t>
+            </a:r>
+            <a:r>
+              <a:rPr lang="en-US" altLang="zh-CN"/>
+              <a:t>ID</a:t>
+            </a:r>
+            <a:r>
+              <a:rPr lang="zh-CN" altLang="en-US"/>
+              <a:t>不用重复计算，省下不必要的</a:t>
+            </a:r>
+            <a:r>
+              <a:rPr lang="en-US" altLang="zh-CN"/>
+              <a:t>GPU</a:t>
+            </a:r>
+            <a:r>
+              <a:rPr lang="zh-CN" altLang="en-US"/>
+              <a:t>算力消耗。第四项优雅停机处理，收到终止信号后立刻停止接收新任务，等所有运行中的任务完成后再退出进程，不会打断正在进行的生成任务。</a:t>
+            </a:r>
+            <a:r>
+              <a:rPr lang="en-US" altLang="zh-CN"/>
+              <a:t>
+</a:t>
+            </a:r>
+            <a:r>
+              <a:rPr lang="zh-CN" altLang="en-US"/>
+              <a:t>第五项媒体完整性校验，限制流式下载单文件大小不超过</a:t>
+            </a:r>
+            <a:r>
+              <a:rPr lang="en-US" altLang="zh-CN"/>
+              <a:t>512MB</a:t>
+            </a:r>
+            <a:r>
+              <a:rPr lang="zh-CN" altLang="en-US"/>
+              <a:t>，生成后提前用</a:t>
+            </a:r>
+            <a:r>
+              <a:rPr lang="en-US" altLang="zh-CN"/>
+              <a:t>Pillow</a:t>
+            </a:r>
+            <a:r>
+              <a:rPr lang="zh-CN" altLang="en-US"/>
+              <a:t>验证图片、用</a:t>
+            </a:r>
+            <a:r>
+              <a:rPr lang="en-US" altLang="zh-CN"/>
+              <a:t>ffmpeg</a:t>
+            </a:r>
+            <a:r>
+              <a:rPr lang="zh-CN" altLang="en-US"/>
+              <a:t>验证视频流，发现损坏直接取消任务，避免把坏文件流入下一环节。第六项过期产物自动清扫，</a:t>
+            </a:r>
+            <a:r>
+              <a:rPr lang="en-US" altLang="zh-CN"/>
+              <a:t>Worker</a:t>
+            </a:r>
+            <a:r>
+              <a:rPr lang="zh-CN" altLang="en-US"/>
+              <a:t>每小时定时清理过期推理临时文件和发布暂存，自动控制磁盘占用，避免存储溢出。</a:t>
+            </a:r>
+            <a:r>
+              <a:rPr lang="en-US" altLang="zh-CN"/>
+              <a:t>
+</a:t>
+            </a:r>
+            <a:r>
+              <a:rPr lang="zh-CN" altLang="en-US"/>
+              <a:t>整套设计围绕「现场重试更便宜安全」的核心原则落地，实现六个核心承诺：不丢任务、不浪费重复算力、不输出脏数据、不中断生成流程、不传递坏文件、不额外占用磁盘空间，完全适配现场随时调整创作的需求。</a:t>
+            </a:r>
+            <a:endParaRPr lang="zh-CN" altLang="en-US"/>
+          </a:p>
+        </p:txBody>
+      </p:sp>
+    </p:spTree>
+  </p:cSld>
+  <p:clrMapOvr>
+    <a:masterClrMapping/>
+  </p:clrMapOvr>
+</p:notes>
+</file>
+
+<file path=ppt/notesSlides/notesSlide15.xml><?xml version="1.0" encoding="utf-8"?>
+<p:notes xmlns:a="http://schemas.openxmlformats.org/drawingml/2006/main" xmlns:r="http://schemas.openxmlformats.org/officeDocument/2006/relationships" xmlns:p="http://schemas.openxmlformats.org/presentationml/2006/main">
+  <p:cSld>
+    <p:spTree>
+      <p:nvGrpSpPr>
+        <p:cNvPr id="1" name=""/>
+        <p:cNvGrpSpPr/>
+        <p:nvPr/>
+      </p:nvGrpSpPr>
+      <p:grpSpPr/>
+      <p:sp>
+        <p:nvSpPr>
+          <p:cNvPr id="2" name="文本占位符 1"/>
+          <p:cNvSpPr>
+            <a:spLocks noGrp="1"/>
+          </p:cNvSpPr>
+          <p:nvPr>
+            <p:ph type="body" sz="quarter"/>
+          </p:nvPr>
+        </p:nvSpPr>
+        <p:spPr>
+          <a:xfrm>
+            <a:off x="662016" y="5242000"/>
+            <a:ext cx="5296132" cy="4288909"/>
+          </a:xfrm>
+          <a:prstGeom prst="rect">
+            <a:avLst/>
+          </a:prstGeom>
+        </p:spPr>
+        <p:txBody>
+          <a:bodyPr/>
+          <a:p>
+            <a:r>
+              <a:rPr lang="zh-CN" altLang="en-US"/>
+              <a:t>我们采用动作级计价模式，拆分到每个生产环节做原子化管理，这套机制能精准控制成本，也能让资源调度更灵活。</a:t>
+            </a:r>
+            <a:r>
+              <a:rPr lang="en-US" altLang="zh-CN"/>
+              <a:t>
+</a:t>
+            </a:r>
+            <a:r>
+              <a:rPr lang="zh-CN" altLang="en-US"/>
+              <a:t>建期和阶段提交时，系统会先预扣对应积分，任务成功就正式结算，任务失败自动释放积分退回账户，完全避免无效扣费。所有计价流水保持不可变且天然幂等，不会出现重复扣减的问题，用量页也会按期按模型分类展示，让每个环节的成本一目了然。</a:t>
+            </a:r>
+            <a:r>
+              <a:rPr lang="en-US" altLang="zh-CN"/>
+              <a:t>
+</a:t>
+            </a:r>
+            <a:r>
+              <a:rPr lang="zh-CN" altLang="en-US"/>
+              <a:t>我们按</a:t>
+            </a:r>
+            <a:r>
+              <a:rPr lang="en-US" altLang="zh-CN"/>
+              <a:t>28</a:t>
+            </a:r>
+            <a:r>
+              <a:rPr lang="zh-CN" altLang="en-US"/>
+              <a:t>镜的常规单期做了成本测算：直出视频路径总共需要</a:t>
+            </a:r>
+            <a:r>
+              <a:rPr lang="en-US" altLang="zh-CN"/>
+              <a:t>282</a:t>
+            </a:r>
+            <a:r>
+              <a:rPr lang="zh-CN" altLang="en-US"/>
+              <a:t>积分，因为省去了生成单独关键帧图片的积分消耗；</a:t>
+            </a:r>
+            <a:r>
+              <a:rPr lang="en-US" altLang="zh-CN"/>
+              <a:t>1</a:t>
+            </a:r>
+            <a:r>
+              <a:rPr lang="zh-CN" altLang="en-US"/>
+              <a:t>个关键帧路径需要</a:t>
+            </a:r>
+            <a:r>
+              <a:rPr lang="en-US" altLang="zh-CN"/>
+              <a:t>310</a:t>
+            </a:r>
+            <a:r>
+              <a:rPr lang="zh-CN" altLang="en-US"/>
+              <a:t>积分，</a:t>
+            </a:r>
+            <a:r>
+              <a:rPr lang="en-US" altLang="zh-CN"/>
+              <a:t>2</a:t>
+            </a:r>
+            <a:r>
+              <a:rPr lang="zh-CN" altLang="en-US"/>
+              <a:t>个关键帧路径需要</a:t>
+            </a:r>
+            <a:r>
+              <a:rPr lang="en-US" altLang="zh-CN"/>
+              <a:t>338</a:t>
+            </a:r>
+            <a:r>
+              <a:rPr lang="zh-CN" altLang="en-US"/>
+              <a:t>积分，</a:t>
+            </a:r>
+            <a:r>
+              <a:rPr lang="en-US" altLang="zh-CN"/>
+              <a:t>3</a:t>
+            </a:r>
+            <a:r>
+              <a:rPr lang="zh-CN" altLang="en-US"/>
+              <a:t>个关键帧路径需要</a:t>
+            </a:r>
+            <a:r>
+              <a:rPr lang="en-US" altLang="zh-CN"/>
+              <a:t>366</a:t>
+            </a:r>
+            <a:r>
+              <a:rPr lang="zh-CN" altLang="en-US"/>
+              <a:t>积分。对比</a:t>
+            </a:r>
+            <a:r>
+              <a:rPr lang="en-US" altLang="zh-CN"/>
+              <a:t>3</a:t>
+            </a:r>
+            <a:r>
+              <a:rPr lang="zh-CN" altLang="en-US"/>
+              <a:t>个关键帧的传统路径，直出路径能节省约</a:t>
+            </a:r>
+            <a:r>
+              <a:rPr lang="en-US" altLang="zh-CN"/>
+              <a:t>23%</a:t>
+            </a:r>
+            <a:r>
+              <a:rPr lang="zh-CN" altLang="en-US"/>
+              <a:t>的成本，优势非常明显。</a:t>
+            </a:r>
+            <a:r>
+              <a:rPr lang="en-US" altLang="zh-CN"/>
+              <a:t>
+</a:t>
+            </a:r>
+            <a:r>
+              <a:rPr lang="zh-CN" altLang="en-US"/>
+              <a:t>除了积分计价，</a:t>
+            </a:r>
+            <a:r>
+              <a:rPr lang="en-US" altLang="zh-CN"/>
+              <a:t>GPU</a:t>
+            </a:r>
+            <a:r>
+              <a:rPr lang="zh-CN" altLang="en-US"/>
+              <a:t>实际用量也会按照「镜数×候选数×单位成本×</a:t>
+            </a:r>
+            <a:r>
+              <a:rPr lang="en-US" altLang="zh-CN"/>
+              <a:t>1.5</a:t>
+            </a:r>
+            <a:r>
+              <a:rPr lang="zh-CN" altLang="en-US"/>
+              <a:t>」的公式独立估算展示，成本透明可查。团队设置了成本红线，就算整期所有环节都走国内商用</a:t>
+            </a:r>
+            <a:r>
+              <a:rPr lang="en-US" altLang="zh-CN"/>
+              <a:t>API</a:t>
+            </a:r>
+            <a:r>
+              <a:rPr lang="zh-CN" altLang="en-US"/>
+              <a:t>，单期总费用也不会超过</a:t>
+            </a:r>
+            <a:r>
+              <a:rPr lang="en-US" altLang="zh-CN"/>
+              <a:t>20</a:t>
+            </a:r>
+            <a:r>
+              <a:rPr lang="zh-CN" altLang="en-US"/>
+              <a:t>元，这个数字是团队内部的预算约束，并非产品对外定价。</a:t>
+            </a:r>
+            <a:r>
+              <a:rPr lang="en-US" altLang="zh-CN"/>
+              <a:t>
+</a:t>
+            </a:r>
+            <a:r>
+              <a:rPr lang="zh-CN" altLang="en-US"/>
+              <a:t>目前我们的积分由团队</a:t>
+            </a:r>
+            <a:r>
+              <a:rPr lang="en-US" altLang="zh-CN"/>
+              <a:t>CLI</a:t>
+            </a:r>
+            <a:r>
+              <a:rPr lang="zh-CN" altLang="en-US"/>
+              <a:t>统一发放，暂时不开放购买与支付功能，后续会根据产品迭代调整这套机制。</a:t>
+            </a:r>
+            <a:endParaRPr lang="zh-CN" altLang="en-US"/>
+          </a:p>
+        </p:txBody>
+      </p:sp>
+    </p:spTree>
+  </p:cSld>
+  <p:clrMapOvr>
+    <a:masterClrMapping/>
+  </p:clrMapOvr>
+</p:notes>
+</file>
+
+<file path=ppt/notesSlides/notesSlide16.xml><?xml version="1.0" encoding="utf-8"?>
+<p:notes xmlns:a="http://schemas.openxmlformats.org/drawingml/2006/main" xmlns:r="http://schemas.openxmlformats.org/officeDocument/2006/relationships" xmlns:p="http://schemas.openxmlformats.org/presentationml/2006/main">
+  <p:cSld>
+    <p:spTree>
+      <p:nvGrpSpPr>
+        <p:cNvPr id="1" name=""/>
+        <p:cNvGrpSpPr/>
+        <p:nvPr/>
+      </p:nvGrpSpPr>
+      <p:grpSpPr/>
+      <p:sp>
+        <p:nvSpPr>
+          <p:cNvPr id="2" name="文本占位符 1"/>
+          <p:cNvSpPr>
+            <a:spLocks noGrp="1"/>
+          </p:cNvSpPr>
+          <p:nvPr>
+            <p:ph type="body" sz="quarter"/>
+          </p:nvPr>
+        </p:nvSpPr>
+        <p:spPr>
+          <a:xfrm>
+            <a:off x="662016" y="5242000"/>
+            <a:ext cx="5296132" cy="4288909"/>
+          </a:xfrm>
+          <a:prstGeom prst="rect">
+            <a:avLst/>
+          </a:prstGeom>
+        </p:spPr>
+        <p:txBody>
+          <a:bodyPr/>
+          <a:p>
+            <a:r>
+              <a:rPr lang="en-US" altLang="en-US"/>
+              <a:t>AI</a:t>
+            </a:r>
+            <a:r>
+              <a:rPr lang="zh-CN" altLang="en-US"/>
+              <a:t>生成内容时代，合规是所有产品设计不能触碰的底线，可旅</a:t>
+            </a:r>
+            <a:r>
+              <a:rPr lang="en-US" altLang="zh-CN"/>
+              <a:t>Kelvoy</a:t>
+            </a:r>
+            <a:r>
+              <a:rPr lang="zh-CN" altLang="en-US"/>
+              <a:t>从架构到产出全链路落地合规要求，给成片加上可靠的安全护栏。</a:t>
+            </a:r>
+            <a:r>
+              <a:rPr lang="en-US" altLang="zh-CN"/>
+              <a:t>
+</a:t>
+            </a:r>
+            <a:r>
+              <a:rPr lang="zh-CN" altLang="en-US"/>
+              <a:t>我们严格遵守最新监管规定，对所有</a:t>
+            </a:r>
+            <a:r>
+              <a:rPr lang="en-US" altLang="zh-CN"/>
+              <a:t>AI</a:t>
+            </a:r>
+            <a:r>
+              <a:rPr lang="zh-CN" altLang="en-US"/>
+              <a:t>生成内容同步添加双重</a:t>
+            </a:r>
+            <a:r>
+              <a:rPr lang="en-US" altLang="zh-CN"/>
+              <a:t>AI</a:t>
+            </a:r>
+            <a:r>
+              <a:rPr lang="zh-CN" altLang="en-US"/>
+              <a:t>标识：既在成片右下角添加半透明的显性水印，明确标注</a:t>
+            </a:r>
+            <a:r>
+              <a:rPr lang="en-US" altLang="zh-CN"/>
+              <a:t>AI</a:t>
+            </a:r>
+            <a:r>
+              <a:rPr lang="zh-CN" altLang="en-US"/>
+              <a:t>生成属性，说明角色虚构、目的地真实的内容属性，也完整保留模型自带的</a:t>
+            </a:r>
+            <a:r>
+              <a:rPr lang="en-US" altLang="zh-CN"/>
+              <a:t>SynthID</a:t>
+            </a:r>
+            <a:r>
+              <a:rPr lang="zh-CN" altLang="en-US"/>
+              <a:t>、</a:t>
+            </a:r>
+            <a:r>
+              <a:rPr lang="en-US" altLang="zh-CN"/>
+              <a:t>C2PA</a:t>
+            </a:r>
+            <a:r>
+              <a:rPr lang="zh-CN" altLang="en-US"/>
+              <a:t>隐式元数据，完全符合</a:t>
+            </a:r>
+            <a:r>
+              <a:rPr lang="en-US" altLang="zh-CN"/>
+              <a:t>2025</a:t>
+            </a:r>
+            <a:r>
+              <a:rPr lang="zh-CN" altLang="en-US"/>
+              <a:t>年</a:t>
+            </a:r>
+            <a:r>
+              <a:rPr lang="en-US" altLang="zh-CN"/>
+              <a:t>9</a:t>
+            </a:r>
+            <a:r>
+              <a:rPr lang="zh-CN" altLang="en-US"/>
+              <a:t>月即将正式施行的《人工智能生成合成内容标识办法》。</a:t>
+            </a:r>
+            <a:r>
+              <a:rPr lang="en-US" altLang="zh-CN"/>
+              <a:t>
+</a:t>
+            </a:r>
+            <a:r>
+              <a:rPr lang="zh-CN" altLang="en-US"/>
+              <a:t>内容安全层面，我们在</a:t>
+            </a:r>
+            <a:r>
+              <a:rPr lang="en-US" altLang="zh-CN"/>
+              <a:t>prompt</a:t>
+            </a:r>
+            <a:r>
+              <a:rPr lang="zh-CN" altLang="en-US"/>
+              <a:t>输入层设置关键词黑名单，从源头拦截违规创作需求，从生成环节阻断违规内容产出。隐私保护上，我们采用多租户行级数据隔离机制，只有对应用户能访问自己的生成内容，用户密钥仅保留在</a:t>
+            </a:r>
+            <a:r>
+              <a:rPr lang="en-US" altLang="zh-CN"/>
+              <a:t>Worker</a:t>
+            </a:r>
+            <a:r>
+              <a:rPr lang="zh-CN" altLang="en-US"/>
+              <a:t>和推理侧，公开分享链接也不会携带任何用户账号信息，全方位保护用户数据安全。</a:t>
+            </a:r>
+            <a:r>
+              <a:rPr lang="en-US" altLang="zh-CN"/>
+              <a:t>
+</a:t>
+            </a:r>
+            <a:r>
+              <a:rPr lang="zh-CN" altLang="en-US"/>
+              <a:t>版权与内容保真层面，我们只使用正规授权曲库的音乐，绝对不生成他人注册商标，所有私营店铺内容统一做虚构处理，地标形象失真直接纳入质量红线要求，保障最终产出内容合规可信。</a:t>
+            </a:r>
+            <a:endParaRPr lang="zh-CN" altLang="en-US"/>
+          </a:p>
+        </p:txBody>
+      </p:sp>
+    </p:spTree>
+  </p:cSld>
+  <p:clrMapOvr>
+    <a:masterClrMapping/>
+  </p:clrMapOvr>
+</p:notes>
+</file>
+
+<file path=ppt/notesSlides/notesSlide17.xml><?xml version="1.0" encoding="utf-8"?>
+<p:notes xmlns:a="http://schemas.openxmlformats.org/drawingml/2006/main" xmlns:r="http://schemas.openxmlformats.org/officeDocument/2006/relationships" xmlns:p="http://schemas.openxmlformats.org/presentationml/2006/main">
+  <p:cSld>
+    <p:spTree>
+      <p:nvGrpSpPr>
+        <p:cNvPr id="1" name=""/>
+        <p:cNvGrpSpPr/>
+        <p:nvPr/>
+      </p:nvGrpSpPr>
+      <p:grpSpPr/>
+      <p:sp>
+        <p:nvSpPr>
+          <p:cNvPr id="2" name="文本占位符 1"/>
+          <p:cNvSpPr>
+            <a:spLocks noGrp="1"/>
+          </p:cNvSpPr>
+          <p:nvPr>
+            <p:ph type="body" sz="quarter"/>
+          </p:nvPr>
+        </p:nvSpPr>
+        <p:spPr>
+          <a:xfrm>
+            <a:off x="662016" y="5242000"/>
+            <a:ext cx="5296132" cy="4288909"/>
+          </a:xfrm>
+          <a:prstGeom prst="rect">
+            <a:avLst/>
+          </a:prstGeom>
+        </p:spPr>
+        <p:txBody>
+          <a:bodyPr/>
+          <a:p>
+            <a:r>
+              <a:rPr lang="zh-CN" altLang="en-US"/>
+              <a:t>讲完核心技术设计，我们进入最直观的展示环节。接下来我会带大家完整走一遍可旅</a:t>
+            </a:r>
+            <a:r>
+              <a:rPr lang="en-US" altLang="zh-CN"/>
+              <a:t>Kelvoy</a:t>
+            </a:r>
+            <a:r>
+              <a:rPr lang="zh-CN" altLang="en-US"/>
+              <a:t>生成一支</a:t>
+            </a:r>
+            <a:r>
+              <a:rPr lang="en-US" altLang="zh-CN"/>
+              <a:t>AI</a:t>
+            </a:r>
+            <a:r>
+              <a:rPr lang="zh-CN" altLang="en-US"/>
+              <a:t>旅行</a:t>
+            </a:r>
+            <a:r>
+              <a:rPr lang="en-US" altLang="zh-CN"/>
+              <a:t>Vlog</a:t>
+            </a:r>
+            <a:r>
+              <a:rPr lang="zh-CN" altLang="en-US"/>
+              <a:t>的全流程，从创建项目到拿到成片只需要六个步骤，整个过程所有环节都支持人工干预调整，不会让</a:t>
+            </a:r>
+            <a:r>
+              <a:rPr lang="en-US" altLang="zh-CN"/>
+              <a:t>AI</a:t>
+            </a:r>
+            <a:r>
+              <a:rPr lang="zh-CN" altLang="en-US"/>
+              <a:t>完全主导创作。</a:t>
+            </a:r>
+            <a:r>
+              <a:rPr lang="en-US" altLang="zh-CN"/>
+              <a:t>
+</a:t>
+            </a:r>
+            <a:r>
+              <a:rPr lang="zh-CN" altLang="en-US"/>
+              <a:t>流程链路非常清晰：先创建新的创作档期，接着审核调整</a:t>
+            </a:r>
+            <a:r>
+              <a:rPr lang="en-US" altLang="zh-CN"/>
+              <a:t>AI</a:t>
+            </a:r>
+            <a:r>
+              <a:rPr lang="zh-CN" altLang="en-US"/>
+              <a:t>生成的分镜脚本，再启动视频生成任务，生成完成后逐镜审核剪辑片段，确认所有内容符合要求后调整合成参数，最后导出成片完成分享。为了保证演示流畅，我们提前预留了缓冲方案，如果现场生成速度不及预期，我们也准备了同角色设定下已经完成的多支成片，保证大家能完整看到产品的最终效果，整个演示不会超过</a:t>
+            </a:r>
+            <a:r>
+              <a:rPr lang="en-US" altLang="zh-CN"/>
+              <a:t>15</a:t>
+            </a:r>
+            <a:r>
+              <a:rPr lang="zh-CN" altLang="en-US"/>
+              <a:t>分钟。</a:t>
+            </a:r>
+            <a:endParaRPr lang="zh-CN" altLang="en-US"/>
+          </a:p>
+        </p:txBody>
+      </p:sp>
+    </p:spTree>
+  </p:cSld>
+  <p:clrMapOvr>
+    <a:masterClrMapping/>
+  </p:clrMapOvr>
+</p:notes>
+</file>
+
+<file path=ppt/notesSlides/notesSlide18.xml><?xml version="1.0" encoding="utf-8"?>
+<p:notes xmlns:a="http://schemas.openxmlformats.org/drawingml/2006/main" xmlns:r="http://schemas.openxmlformats.org/officeDocument/2006/relationships" xmlns:p="http://schemas.openxmlformats.org/presentationml/2006/main">
+  <p:cSld>
+    <p:spTree>
+      <p:nvGrpSpPr>
+        <p:cNvPr id="1" name=""/>
+        <p:cNvGrpSpPr/>
+        <p:nvPr/>
+      </p:nvGrpSpPr>
+      <p:grpSpPr/>
+      <p:sp>
+        <p:nvSpPr>
+          <p:cNvPr id="2" name="文本占位符 1"/>
+          <p:cNvSpPr>
+            <a:spLocks noGrp="1"/>
+          </p:cNvSpPr>
+          <p:nvPr>
+            <p:ph type="body" sz="quarter"/>
+          </p:nvPr>
+        </p:nvSpPr>
+        <p:spPr>
+          <a:xfrm>
+            <a:off x="662016" y="5242000"/>
+            <a:ext cx="5296132" cy="4288909"/>
+          </a:xfrm>
+          <a:prstGeom prst="rect">
+            <a:avLst/>
+          </a:prstGeom>
+        </p:spPr>
+        <p:txBody>
+          <a:bodyPr/>
+          <a:p>
+            <a:r>
+              <a:rPr lang="zh-CN" altLang="en-US"/>
+              <a:t>接下来我们走一遍完整的生成流程，整个过程全链路支持用户手动干预，所有操作都围绕用户的创作意愿调整。</a:t>
+            </a:r>
+            <a:r>
+              <a:rPr lang="en-US" altLang="zh-CN"/>
+              <a:t>
+</a:t>
+            </a:r>
+            <a:r>
+              <a:rPr lang="zh-CN" altLang="en-US"/>
+              <a:t>第一步新建创作期，我们直接选用预设的官方角色，目的地选灵山大佛，画幅设置为适配短视频的</a:t>
+            </a:r>
+            <a:r>
+              <a:rPr lang="en-US" altLang="zh-CN"/>
+              <a:t>9:16</a:t>
+            </a:r>
+            <a:r>
+              <a:rPr lang="zh-CN" altLang="en-US"/>
+              <a:t>，选择双参考直出路径，系统会立刻算出本次生成需要消耗的积分，大家可以直观看到成本。</a:t>
+            </a:r>
+            <a:r>
+              <a:rPr lang="en-US" altLang="zh-CN"/>
+              <a:t>
+</a:t>
+            </a:r>
+            <a:r>
+              <a:rPr lang="zh-CN" altLang="en-US"/>
+              <a:t>第二步审核生成的脚本，我们可以直接修改任意镜头的字幕，删除不需要的镜头，还能输入自定义优化指令让</a:t>
+            </a:r>
+            <a:r>
+              <a:rPr lang="en-US" altLang="zh-CN"/>
+              <a:t>AI</a:t>
+            </a:r>
+            <a:r>
+              <a:rPr lang="zh-CN" altLang="en-US"/>
+              <a:t>重新生成脚本，完全不用被动接受</a:t>
+            </a:r>
+            <a:r>
+              <a:rPr lang="en-US" altLang="zh-CN"/>
+              <a:t>AI</a:t>
+            </a:r>
+            <a:r>
+              <a:rPr lang="zh-CN" altLang="en-US"/>
+              <a:t>的初始输出。</a:t>
+            </a:r>
+            <a:r>
+              <a:rPr lang="en-US" altLang="zh-CN"/>
+              <a:t>
+</a:t>
+            </a:r>
+            <a:r>
+              <a:rPr lang="zh-CN" altLang="en-US"/>
+              <a:t>第三步启动视频生成，确认素材无误后开启双参考直出模式，进度页会实时轮询展示每个任务的生成状态，不用一直守在页面刷新。</a:t>
+            </a:r>
+            <a:r>
+              <a:rPr lang="en-US" altLang="zh-CN"/>
+              <a:t>
+</a:t>
+            </a:r>
+            <a:r>
+              <a:rPr lang="zh-CN" altLang="en-US"/>
+              <a:t>第四步审核生成好的片段，我们用拖动滑块的方式精准选取想要的</a:t>
+            </a:r>
+            <a:r>
+              <a:rPr lang="en-US" altLang="zh-CN"/>
+              <a:t>1</a:t>
+            </a:r>
+            <a:r>
+              <a:rPr lang="zh-CN" altLang="en-US"/>
+              <a:t>秒片段，逐一核对五项质量红线，标记不合格的坏镜触发重新生成即可。</a:t>
+            </a:r>
+            <a:r>
+              <a:rPr lang="en-US" altLang="zh-CN"/>
+              <a:t>
+</a:t>
+            </a:r>
+            <a:r>
+              <a:rPr lang="zh-CN" altLang="en-US"/>
+              <a:t>第五步进入合成环节，确认好成片标题、搭配的配乐和字幕参数后启动合成，系统会自动调用</a:t>
+            </a:r>
+            <a:r>
+              <a:rPr lang="en-US" altLang="zh-CN"/>
+              <a:t>ffprobe</a:t>
+            </a:r>
+            <a:r>
+              <a:rPr lang="zh-CN" altLang="en-US"/>
+              <a:t>完成成品验证，确认文件无损坏后才会交付。</a:t>
+            </a:r>
+            <a:r>
+              <a:rPr lang="en-US" altLang="zh-CN"/>
+              <a:t>
+</a:t>
+            </a:r>
+            <a:r>
+              <a:rPr lang="zh-CN" altLang="en-US"/>
+              <a:t>最后一步就是下载和分享，我们可以直接在线播放成片，下载</a:t>
+            </a:r>
+            <a:r>
+              <a:rPr lang="en-US" altLang="zh-CN"/>
+              <a:t>MP4</a:t>
+            </a:r>
+            <a:r>
+              <a:rPr lang="zh-CN" altLang="en-US"/>
+              <a:t>文件，也可以生成带二维码的公开分享链接，把作品直接分享出去。</a:t>
+            </a:r>
+            <a:r>
+              <a:rPr lang="en-US" altLang="zh-CN"/>
+              <a:t>
+</a:t>
+            </a:r>
+            <a:r>
+              <a:rPr lang="zh-CN" altLang="en-US"/>
+              <a:t>整个流程预计耗时</a:t>
+            </a:r>
+            <a:r>
+              <a:rPr lang="en-US" altLang="zh-CN"/>
+              <a:t>10</a:t>
+            </a:r>
+            <a:r>
+              <a:rPr lang="zh-CN" altLang="en-US"/>
+              <a:t>到</a:t>
+            </a:r>
+            <a:r>
+              <a:rPr lang="en-US" altLang="zh-CN"/>
+              <a:t>15</a:t>
+            </a:r>
+            <a:r>
+              <a:rPr lang="zh-CN" altLang="en-US"/>
+              <a:t>分钟，我们也提前准备好了同角色的已完成成片和公开分享链接，就算现场出现网络波动，也能完整走完整个故事线，给大家展示完整的产品能力。</a:t>
+            </a:r>
+            <a:endParaRPr lang="zh-CN" altLang="en-US"/>
+          </a:p>
+        </p:txBody>
+      </p:sp>
+    </p:spTree>
+  </p:cSld>
+  <p:clrMapOvr>
+    <a:masterClrMapping/>
+  </p:clrMapOvr>
+</p:notes>
+</file>
+
+<file path=ppt/notesSlides/notesSlide19.xml><?xml version="1.0" encoding="utf-8"?>
+<p:notes xmlns:a="http://schemas.openxmlformats.org/drawingml/2006/main" xmlns:r="http://schemas.openxmlformats.org/officeDocument/2006/relationships" xmlns:p="http://schemas.openxmlformats.org/presentationml/2006/main">
+  <p:cSld>
+    <p:spTree>
+      <p:nvGrpSpPr>
+        <p:cNvPr id="1" name=""/>
+        <p:cNvGrpSpPr/>
+        <p:nvPr/>
+      </p:nvGrpSpPr>
+      <p:grpSpPr/>
+      <p:sp>
+        <p:nvSpPr>
+          <p:cNvPr id="2" name="文本占位符 1"/>
+          <p:cNvSpPr>
+            <a:spLocks noGrp="1"/>
+          </p:cNvSpPr>
+          <p:nvPr>
+            <p:ph type="body" sz="quarter"/>
+          </p:nvPr>
+        </p:nvSpPr>
+        <p:spPr>
+          <a:xfrm>
+            <a:off x="662016" y="5242000"/>
+            <a:ext cx="5296132" cy="4288909"/>
+          </a:xfrm>
+          <a:prstGeom prst="rect">
+            <a:avLst/>
+          </a:prstGeom>
+        </p:spPr>
+        <p:txBody>
+          <a:bodyPr/>
+          <a:p>
+            <a:r>
+              <a:rPr lang="zh-CN" altLang="en-US"/>
+              <a:t>今天我们从产品定义到技术落地，完整拆解了可旅</a:t>
+            </a:r>
+            <a:r>
+              <a:rPr lang="en-US" altLang="zh-CN"/>
+              <a:t>Kelvoy</a:t>
+            </a:r>
+            <a:r>
+              <a:rPr lang="zh-CN" altLang="en-US"/>
+              <a:t>这款</a:t>
+            </a:r>
+            <a:r>
+              <a:rPr lang="en-US" altLang="zh-CN"/>
+              <a:t>AI</a:t>
+            </a:r>
+            <a:r>
+              <a:rPr lang="zh-CN" altLang="en-US"/>
+              <a:t>旅行</a:t>
+            </a:r>
+            <a:r>
+              <a:rPr lang="en-US" altLang="zh-CN"/>
+              <a:t>Vlog</a:t>
+            </a:r>
+            <a:r>
+              <a:rPr lang="zh-CN" altLang="en-US"/>
+              <a:t>生产工作台：我们坚持</a:t>
+            </a:r>
+            <a:r>
+              <a:rPr lang="en-US" altLang="zh-CN"/>
+              <a:t>1</a:t>
+            </a:r>
+            <a:r>
+              <a:rPr lang="zh-CN" altLang="en-US"/>
+              <a:t>秒</a:t>
+            </a:r>
+            <a:r>
+              <a:rPr lang="en-US" altLang="zh-CN"/>
+              <a:t>1</a:t>
+            </a:r>
+            <a:r>
+              <a:rPr lang="zh-CN" altLang="en-US"/>
+              <a:t>镜</a:t>
+            </a:r>
+            <a:r>
+              <a:rPr lang="en-US" altLang="zh-CN"/>
+              <a:t>30</a:t>
+            </a:r>
+            <a:r>
+              <a:rPr lang="zh-CN" altLang="en-US"/>
+              <a:t>帧的标准化剪辑，适配当下信息流用户的观看习惯；我们打造本地优先的单机闭环架构，把重试成本降到最低，把一致性风险压到最小，更严格守住了合规的底线；我们用动作级计价控制成本，最终实现了今天这样一套，让普通人也能几分钟生成完整旅行</a:t>
+            </a:r>
+            <a:r>
+              <a:rPr lang="en-US" altLang="zh-CN"/>
+              <a:t>Vlog</a:t>
+            </a:r>
+            <a:r>
+              <a:rPr lang="zh-CN" altLang="en-US"/>
+              <a:t>的工具。</a:t>
+            </a:r>
+            <a:r>
+              <a:rPr lang="en-US" altLang="zh-CN"/>
+              <a:t>
+</a:t>
+            </a:r>
+            <a:r>
+              <a:rPr lang="zh-CN" altLang="en-US"/>
+              <a:t>我们做可旅的初心很简单：太多人喜欢旅行，却总因为不会剪辑、没时间创作，把珍贵的旅行回忆藏在了手机相册里。而可旅想做的，就是帮你打破技术门槛</a:t>
+            </a:r>
+            <a:r>
+              <a:rPr lang="en-US" altLang="zh-CN"/>
+              <a:t>——</a:t>
+            </a:r>
+            <a:r>
+              <a:rPr lang="zh-CN" altLang="en-US"/>
+              <a:t>选一个喜欢的角色，去你想去的真实目的地，就能一键生成属于你的专属旅行</a:t>
+            </a:r>
+            <a:r>
+              <a:rPr lang="en-US" altLang="zh-CN"/>
+              <a:t>Vlog</a:t>
+            </a:r>
+            <a:r>
+              <a:rPr lang="zh-CN" altLang="en-US"/>
+              <a:t>，让每一场出发，都能留下可分享的纪念。</a:t>
+            </a:r>
+            <a:r>
+              <a:rPr lang="en-US" altLang="zh-CN"/>
+              <a:t>
+</a:t>
+            </a:r>
+            <a:r>
+              <a:rPr lang="zh-CN" altLang="en-US"/>
+              <a:t>这个项目完全开源，采用</a:t>
+            </a:r>
+            <a:r>
+              <a:rPr lang="en-US" altLang="zh-CN"/>
+              <a:t>Apache License 2.0</a:t>
+            </a:r>
+            <a:r>
+              <a:rPr lang="zh-CN" altLang="en-US"/>
+              <a:t>协议，地址就在这页幻灯片上，欢迎各位体验、</a:t>
+            </a:r>
+            <a:r>
+              <a:rPr lang="en-US" altLang="zh-CN"/>
+              <a:t>Star</a:t>
+            </a:r>
+            <a:r>
+              <a:rPr lang="zh-CN" altLang="en-US"/>
+              <a:t>、贡献代码。在这里再次感谢项目组每一位成员的付出，也感谢</a:t>
+            </a:r>
+            <a:r>
+              <a:rPr lang="en-US" altLang="zh-CN"/>
+              <a:t>NVIDIA DGX Spark</a:t>
+            </a:r>
+            <a:r>
+              <a:rPr lang="zh-CN" altLang="en-US"/>
+              <a:t>黑客松，还有所有为我们提供技术支持的开源社区与合作伙伴。</a:t>
+            </a:r>
+            <a:r>
+              <a:rPr lang="en-US" altLang="zh-CN"/>
+              <a:t>
+</a:t>
+            </a:r>
+            <a:r>
+              <a:rPr lang="zh-CN" altLang="en-US"/>
+              <a:t>未来可旅会继续迭代，让更多普通人能轻松记录旅行、留住回忆。也邀请各位去体验可旅，用它生成你的下一段旅行</a:t>
+            </a:r>
+            <a:r>
+              <a:rPr lang="en-US" altLang="zh-CN"/>
+              <a:t>Vlog</a:t>
+            </a:r>
+            <a:r>
+              <a:rPr lang="zh-CN" altLang="en-US"/>
+              <a:t>。可旅，让每一场旅行都有</a:t>
+            </a:r>
+            <a:r>
+              <a:rPr lang="en-US" altLang="zh-CN"/>
+              <a:t>Vlog</a:t>
+            </a:r>
+            <a:r>
+              <a:rPr lang="zh-CN" altLang="en-US"/>
+              <a:t>。谢谢大家！</a:t>
+            </a:r>
+            <a:endParaRPr lang="zh-CN" altLang="en-US"/>
+          </a:p>
+        </p:txBody>
+      </p:sp>
+    </p:spTree>
+  </p:cSld>
+  <p:clrMapOvr>
+    <a:masterClrMapping/>
+  </p:clrMapOvr>
+</p:notes>
+</file>
+
+<file path=ppt/notesSlides/notesSlide2.xml><?xml version="1.0" encoding="utf-8"?>
+<p:notes xmlns:a="http://schemas.openxmlformats.org/drawingml/2006/main" xmlns:r="http://schemas.openxmlformats.org/officeDocument/2006/relationships" xmlns:p="http://schemas.openxmlformats.org/presentationml/2006/main">
+  <p:cSld>
+    <p:spTree>
+      <p:nvGrpSpPr>
+        <p:cNvPr id="1" name=""/>
+        <p:cNvGrpSpPr/>
+        <p:nvPr/>
+      </p:nvGrpSpPr>
+      <p:grpSpPr/>
+      <p:sp>
+        <p:nvSpPr>
+          <p:cNvPr id="2" name="文本占位符 1"/>
+          <p:cNvSpPr>
+            <a:spLocks noGrp="1"/>
+          </p:cNvSpPr>
+          <p:nvPr>
+            <p:ph type="body" sz="quarter"/>
+          </p:nvPr>
+        </p:nvSpPr>
+        <p:spPr>
+          <a:xfrm>
+            <a:off x="662016" y="5242000"/>
+            <a:ext cx="5296132" cy="4288909"/>
+          </a:xfrm>
+          <a:prstGeom prst="rect">
+            <a:avLst/>
+          </a:prstGeom>
+        </p:spPr>
+        <p:txBody>
+          <a:bodyPr/>
+          <a:p>
+            <a:r>
+              <a:rPr lang="zh-CN" altLang="en-US"/>
+              <a:t>本次可旅</a:t>
+            </a:r>
+            <a:r>
+              <a:rPr lang="en-US" altLang="zh-CN"/>
+              <a:t>AI</a:t>
+            </a:r>
+            <a:r>
+              <a:rPr lang="zh-CN" altLang="en-US"/>
+              <a:t>旅行</a:t>
+            </a:r>
+            <a:r>
+              <a:rPr lang="en-US" altLang="zh-CN"/>
+              <a:t>Vlog</a:t>
+            </a:r>
+            <a:r>
+              <a:rPr lang="zh-CN" altLang="en-US"/>
+              <a:t>生产工作台的</a:t>
+            </a:r>
+            <a:r>
+              <a:rPr lang="en-US" altLang="zh-CN"/>
+              <a:t>DEMO</a:t>
+            </a:r>
+            <a:r>
+              <a:rPr lang="zh-CN" altLang="en-US"/>
+              <a:t>分享共分为四个层层递进的部分，遵循从动因到方案再到落地展示的逻辑展开。第一部分梳理问题与机会，明确产品痛点与破局基础；第二部分介绍产品与体验，说明核心功能与使用流程；第三部分拆解技术与工程的实现逻辑；最后将进行直观的现场演示。</a:t>
+            </a:r>
+            <a:endParaRPr lang="zh-CN" altLang="en-US"/>
+          </a:p>
+        </p:txBody>
+      </p:sp>
+    </p:spTree>
+  </p:cSld>
+  <p:clrMapOvr>
+    <a:masterClrMapping/>
+  </p:clrMapOvr>
+</p:notes>
+</file>
+
+<file path=ppt/notesSlides/notesSlide3.xml><?xml version="1.0" encoding="utf-8"?>
+<p:notes xmlns:a="http://schemas.openxmlformats.org/drawingml/2006/main" xmlns:r="http://schemas.openxmlformats.org/officeDocument/2006/relationships" xmlns:p="http://schemas.openxmlformats.org/presentationml/2006/main">
+  <p:cSld>
+    <p:spTree>
+      <p:nvGrpSpPr>
+        <p:cNvPr id="1" name=""/>
+        <p:cNvGrpSpPr/>
+        <p:nvPr/>
+      </p:nvGrpSpPr>
+      <p:grpSpPr/>
+      <p:sp>
+        <p:nvSpPr>
+          <p:cNvPr id="2" name="文本占位符 1"/>
+          <p:cNvSpPr>
+            <a:spLocks noGrp="1"/>
+          </p:cNvSpPr>
+          <p:nvPr>
+            <p:ph type="body" sz="quarter"/>
+          </p:nvPr>
+        </p:nvSpPr>
+        <p:spPr>
+          <a:xfrm>
+            <a:off x="662016" y="5242000"/>
+            <a:ext cx="5296132" cy="4288909"/>
+          </a:xfrm>
+          <a:prstGeom prst="rect">
+            <a:avLst/>
+          </a:prstGeom>
+        </p:spPr>
+        <p:txBody>
+          <a:bodyPr/>
+          <a:p>
+            <a:r>
+              <a:rPr lang="zh-CN" altLang="en-US"/>
+              <a:t>我们先来看项目的核心出发点，先理清为什么我们要做可旅这款</a:t>
+            </a:r>
+            <a:r>
+              <a:rPr lang="en-US" altLang="zh-CN"/>
+              <a:t>AI</a:t>
+            </a:r>
+            <a:r>
+              <a:rPr lang="zh-CN" altLang="en-US"/>
+              <a:t>旅行</a:t>
+            </a:r>
+            <a:r>
+              <a:rPr lang="en-US" altLang="zh-CN"/>
+              <a:t>Vlog</a:t>
+            </a:r>
+            <a:r>
+              <a:rPr lang="zh-CN" altLang="en-US"/>
+              <a:t>生产工具。</a:t>
+            </a:r>
+            <a:r>
+              <a:rPr lang="en-US" altLang="zh-CN"/>
+              <a:t>
+</a:t>
+            </a:r>
+            <a:r>
+              <a:rPr lang="zh-CN" altLang="en-US"/>
+              <a:t>现在旅行内容赛道想要持续稳定产出内容，已经遇到了三个很难绕开的卡点。第一点，真人拍摄的成本居高不下，博主档期难协调不说，同一人设跨期拍摄还很容易出现形象不一致的问题，更麻烦的是频繁换脸会让账号长期积累的粉丝资产无法沉淀。</a:t>
+            </a:r>
+            <a:r>
+              <a:rPr lang="en-US" altLang="zh-CN"/>
+              <a:t>
+</a:t>
+            </a:r>
+            <a:r>
+              <a:rPr lang="zh-CN" altLang="en-US"/>
+              <a:t>第二点，现有的通用</a:t>
+            </a:r>
+            <a:r>
+              <a:rPr lang="en-US" altLang="zh-CN"/>
+              <a:t>AI</a:t>
+            </a:r>
+            <a:r>
+              <a:rPr lang="zh-CN" altLang="en-US"/>
+              <a:t>生成工具大多是不透明的黑盒，一键生成的结果不可控也没法针对性修改，满足不了旅行账号稳定更新的需求。</a:t>
+            </a:r>
+            <a:r>
+              <a:rPr lang="en-US" altLang="zh-CN"/>
+              <a:t>
+</a:t>
+            </a:r>
+            <a:r>
+              <a:rPr lang="zh-CN" altLang="en-US"/>
+              <a:t>而我们找到的破局机会，刚好依托</a:t>
+            </a:r>
+            <a:r>
+              <a:rPr lang="en-US" altLang="zh-CN"/>
+              <a:t>DGX Spark</a:t>
+            </a:r>
+            <a:r>
+              <a:rPr lang="zh-CN" altLang="en-US"/>
+              <a:t>的硬件能力落地：它搭载的</a:t>
+            </a:r>
+            <a:r>
+              <a:rPr lang="en-US" altLang="zh-CN"/>
+              <a:t>128GB</a:t>
+            </a:r>
+            <a:r>
+              <a:rPr lang="zh-CN" altLang="en-US"/>
+              <a:t>统一内存，完全可以支撑脚本生成、图像生成、视频生成到最终合成的全流程，在本地单台设备上跑通完整流水线，这个基础条件让我们可以针对性解决行业痛点，打造专属的生产工具。</a:t>
+            </a:r>
+            <a:endParaRPr lang="zh-CN" altLang="en-US"/>
+          </a:p>
+        </p:txBody>
+      </p:sp>
+    </p:spTree>
+  </p:cSld>
+  <p:clrMapOvr>
+    <a:masterClrMapping/>
+  </p:clrMapOvr>
+</p:notes>
+</file>
+
+<file path=ppt/notesSlides/notesSlide4.xml><?xml version="1.0" encoding="utf-8"?>
+<p:notes xmlns:a="http://schemas.openxmlformats.org/drawingml/2006/main" xmlns:r="http://schemas.openxmlformats.org/officeDocument/2006/relationships" xmlns:p="http://schemas.openxmlformats.org/presentationml/2006/main">
+  <p:cSld>
+    <p:spTree>
+      <p:nvGrpSpPr>
+        <p:cNvPr id="1" name=""/>
+        <p:cNvGrpSpPr/>
+        <p:nvPr/>
+      </p:nvGrpSpPr>
+      <p:grpSpPr/>
+      <p:sp>
+        <p:nvSpPr>
+          <p:cNvPr id="2" name="文本占位符 1"/>
+          <p:cNvSpPr>
+            <a:spLocks noGrp="1"/>
+          </p:cNvSpPr>
+          <p:nvPr>
+            <p:ph type="body" sz="quarter"/>
+          </p:nvPr>
+        </p:nvSpPr>
+        <p:spPr>
+          <a:xfrm>
+            <a:off x="662016" y="5242000"/>
+            <a:ext cx="5296132" cy="4288909"/>
+          </a:xfrm>
+          <a:prstGeom prst="rect">
+            <a:avLst/>
+          </a:prstGeom>
+        </p:spPr>
+        <p:txBody>
+          <a:bodyPr/>
+          <a:p>
+            <a:r>
+              <a:rPr lang="zh-CN" altLang="en-US"/>
+              <a:t>我们先拆解行业里真实存在的痛点，旅行内容的持续批量生产，目前卡着三个无法绕开的核心问题。</a:t>
+            </a:r>
+            <a:r>
+              <a:rPr lang="en-US" altLang="zh-CN"/>
+              <a:t>
+</a:t>
+            </a:r>
+            <a:r>
+              <a:rPr lang="zh-CN" altLang="en-US"/>
+              <a:t>第一个问题是真人生产的成本门槛。想要稳定更新旅行内容，不仅拍摄、档期的费用居高不下，更麻烦的是很难长期维持人设形象统一，很多账号做几期内容，主角的脸和气质就变了，根本没法沉淀属于账号的长期资产。</a:t>
+            </a:r>
+            <a:r>
+              <a:rPr lang="en-US" altLang="zh-CN"/>
+              <a:t>
+</a:t>
+            </a:r>
+            <a:r>
+              <a:rPr lang="zh-CN" altLang="en-US"/>
+              <a:t>第二个问题来自现有通用</a:t>
+            </a:r>
+            <a:r>
+              <a:rPr lang="en-US" altLang="zh-CN"/>
+              <a:t>AI</a:t>
+            </a:r>
+            <a:r>
+              <a:rPr lang="zh-CN" altLang="en-US"/>
+              <a:t>工具的局限性。大部分工具都是一键生成的黑盒模式，产出内容不符合预期也没法修改调整，通用剪辑工具更是只负责拼接片段，完全不管内容素材的生成过程，很难满足稳定生产的需求。</a:t>
+            </a:r>
+            <a:r>
+              <a:rPr lang="en-US" altLang="zh-CN"/>
+              <a:t>
+</a:t>
+            </a:r>
+            <a:r>
+              <a:rPr lang="zh-CN" altLang="en-US"/>
+              <a:t>第三个问题精准击中了文旅代运营场景的空白。现在代运营商家需要给同一个账号做多个目的地的内容，要求稳定更新，但现有工具完全没有针对这个高频需求做专门设计。</a:t>
+            </a:r>
+            <a:r>
+              <a:rPr lang="en-US" altLang="zh-CN"/>
+              <a:t>
+</a:t>
+            </a:r>
+            <a:r>
+              <a:rPr lang="zh-CN" altLang="en-US"/>
+              <a:t>这些痛点刚好留给我们破局的机会，我们已经用参考片验证了技术方向：「静帧锁一致性</a:t>
+            </a:r>
+            <a:r>
+              <a:rPr lang="en-US" altLang="zh-CN"/>
+              <a:t>+1</a:t>
+            </a:r>
+            <a:r>
+              <a:rPr lang="zh-CN" altLang="en-US"/>
+              <a:t>秒一镜」的方案可以稳定产出合格内容，加上</a:t>
+            </a:r>
+            <a:r>
+              <a:rPr lang="en-US" altLang="zh-CN"/>
+              <a:t>NVIDIA DGX Spark 128GB</a:t>
+            </a:r>
+            <a:r>
+              <a:rPr lang="zh-CN" altLang="en-US"/>
+              <a:t>的大统一内存，足以把脚本生成、图像创作、视频生成到最终合成的全流程，放在本地单机跑通完整流水线，刚好解决成本高、不可控、缺场景适配这三个核心问题。</a:t>
+            </a:r>
+            <a:endParaRPr lang="zh-CN" altLang="en-US"/>
+          </a:p>
+        </p:txBody>
+      </p:sp>
+    </p:spTree>
+  </p:cSld>
+  <p:clrMapOvr>
+    <a:masterClrMapping/>
+  </p:clrMapOvr>
+</p:notes>
+</file>
+
+<file path=ppt/notesSlides/notesSlide5.xml><?xml version="1.0" encoding="utf-8"?>
+<p:notes xmlns:a="http://schemas.openxmlformats.org/drawingml/2006/main" xmlns:r="http://schemas.openxmlformats.org/officeDocument/2006/relationships" xmlns:p="http://schemas.openxmlformats.org/presentationml/2006/main">
+  <p:cSld>
+    <p:spTree>
+      <p:nvGrpSpPr>
+        <p:cNvPr id="1" name=""/>
+        <p:cNvGrpSpPr/>
+        <p:nvPr/>
+      </p:nvGrpSpPr>
+      <p:grpSpPr/>
+      <p:sp>
+        <p:nvSpPr>
+          <p:cNvPr id="2" name="文本占位符 1"/>
+          <p:cNvSpPr>
+            <a:spLocks noGrp="1"/>
+          </p:cNvSpPr>
+          <p:nvPr>
+            <p:ph type="body" sz="quarter"/>
+          </p:nvPr>
+        </p:nvSpPr>
+        <p:spPr>
+          <a:xfrm>
+            <a:off x="662016" y="5242000"/>
+            <a:ext cx="5296132" cy="4288909"/>
+          </a:xfrm>
+          <a:prstGeom prst="rect">
+            <a:avLst/>
+          </a:prstGeom>
+        </p:spPr>
+        <p:txBody>
+          <a:bodyPr/>
+          <a:p>
+            <a:r>
+              <a:rPr lang="zh-CN" altLang="en-US"/>
+              <a:t>刚刚我们理清了当前旅行内容生产领域的核心痛点和破局基础，接下来我们进入产品层面的介绍，看看可旅到底是什么样的产品。</a:t>
+            </a:r>
+            <a:r>
+              <a:rPr lang="en-US" altLang="zh-CN"/>
+              <a:t>
+</a:t>
+            </a:r>
+            <a:r>
+              <a:rPr lang="zh-CN" altLang="en-US"/>
+              <a:t>可旅的核心定位非常清晰，它是围绕「</a:t>
+            </a:r>
+            <a:r>
+              <a:rPr lang="en-US" altLang="zh-CN"/>
+              <a:t>AI </a:t>
+            </a:r>
+            <a:r>
+              <a:rPr lang="zh-CN" altLang="en-US"/>
+              <a:t>旅行</a:t>
+            </a:r>
+            <a:r>
+              <a:rPr lang="en-US" altLang="zh-CN"/>
+              <a:t> Vlog</a:t>
+            </a:r>
+            <a:r>
+              <a:rPr lang="zh-CN" altLang="en-US"/>
+              <a:t>自动生成」搭建的生产工作台，核心逻辑可以用三句话讲清楚。你只需要提供一个提前建好的虚拟角色，选定一个目标景区，就能在短时间内产出一期符合要求的</a:t>
+            </a:r>
+            <a:r>
+              <a:rPr lang="en-US" altLang="zh-CN"/>
+              <a:t>30</a:t>
+            </a:r>
+            <a:r>
+              <a:rPr lang="zh-CN" altLang="en-US"/>
+              <a:t>秒旅行</a:t>
+            </a:r>
+            <a:r>
+              <a:rPr lang="en-US" altLang="zh-CN"/>
+              <a:t>Vlog</a:t>
+            </a:r>
+            <a:r>
+              <a:rPr lang="zh-CN" altLang="en-US"/>
+              <a:t>。</a:t>
+            </a:r>
+            <a:r>
+              <a:rPr lang="en-US" altLang="zh-CN"/>
+              <a:t>
+</a:t>
+            </a:r>
+            <a:r>
+              <a:rPr lang="zh-CN" altLang="en-US"/>
+              <a:t>整个生产过程分成六个递进的生成阶段，同时设置三个人工审核节点把控最终成片质量，既借</a:t>
+            </a:r>
+            <a:r>
+              <a:rPr lang="en-US" altLang="zh-CN"/>
+              <a:t>AI</a:t>
+            </a:r>
+            <a:r>
+              <a:rPr lang="zh-CN" altLang="en-US"/>
+              <a:t>放大生产效率，又保留人工对内容的调整空间，不会出现黑盒生成不可控的问题。</a:t>
+            </a:r>
+            <a:r>
+              <a:rPr lang="en-US" altLang="zh-CN"/>
+              <a:t>
+</a:t>
+            </a:r>
+            <a:r>
+              <a:rPr lang="zh-CN" altLang="en-US"/>
+              <a:t>产品本身也适配不同的生产需求，如果你是批量更新账号内容，直接走默认的直出流程就能快速拿到成品；如果要做重点宣传的项目，也可以切换到精修路径，逐帧调整画面细节，兼顾效率和质量。</a:t>
+            </a:r>
+            <a:endParaRPr lang="zh-CN" altLang="en-US"/>
+          </a:p>
+        </p:txBody>
+      </p:sp>
+    </p:spTree>
+  </p:cSld>
+  <p:clrMapOvr>
+    <a:masterClrMapping/>
+  </p:clrMapOvr>
+</p:notes>
+</file>
+
+<file path=ppt/notesSlides/notesSlide6.xml><?xml version="1.0" encoding="utf-8"?>
+<p:notes xmlns:a="http://schemas.openxmlformats.org/drawingml/2006/main" xmlns:r="http://schemas.openxmlformats.org/officeDocument/2006/relationships" xmlns:p="http://schemas.openxmlformats.org/presentationml/2006/main">
+  <p:cSld>
+    <p:spTree>
+      <p:nvGrpSpPr>
+        <p:cNvPr id="1" name=""/>
+        <p:cNvGrpSpPr/>
+        <p:nvPr/>
+      </p:nvGrpSpPr>
+      <p:grpSpPr/>
+      <p:sp>
+        <p:nvSpPr>
+          <p:cNvPr id="2" name="文本占位符 1"/>
+          <p:cNvSpPr>
+            <a:spLocks noGrp="1"/>
+          </p:cNvSpPr>
+          <p:nvPr>
+            <p:ph type="body" sz="quarter"/>
+          </p:nvPr>
+        </p:nvSpPr>
+        <p:spPr>
+          <a:xfrm>
+            <a:off x="662016" y="5242000"/>
+            <a:ext cx="5296132" cy="4288909"/>
+          </a:xfrm>
+          <a:prstGeom prst="rect">
+            <a:avLst/>
+          </a:prstGeom>
+        </p:spPr>
+        <p:txBody>
+          <a:bodyPr/>
+          <a:p>
+            <a:r>
+              <a:rPr lang="zh-CN" altLang="en-US"/>
+              <a:t>我们先明确可旅产品的核心定义：只需要提供一个虚拟角色，选定一个目标景区，就能快速生成一条约</a:t>
+            </a:r>
+            <a:r>
+              <a:rPr lang="en-US" altLang="zh-CN"/>
+              <a:t>30</a:t>
+            </a:r>
+            <a:r>
+              <a:rPr lang="zh-CN" altLang="en-US"/>
+              <a:t>秒的旅行</a:t>
+            </a:r>
+            <a:r>
+              <a:rPr lang="en-US" altLang="zh-CN"/>
+              <a:t>Vlog</a:t>
+            </a:r>
+            <a:r>
+              <a:rPr lang="zh-CN" altLang="en-US"/>
+              <a:t>成品。</a:t>
+            </a:r>
+            <a:r>
+              <a:rPr lang="en-US" altLang="zh-CN"/>
+              <a:t>
+</a:t>
+            </a:r>
+            <a:r>
+              <a:rPr lang="zh-CN" altLang="en-US"/>
+              <a:t>输入环节支持沉淀账号级的角色资产，我们用三视图参考锁定角色的核心外形特征，保证同一账号的人设在不同内容里保持统一，同时支持每期灵活更换穿搭，满足内容的新鲜感需求。目的地采用官方统一维护的共享资产模式，我们为每个景区打造专属符号包，内置</a:t>
+            </a:r>
+            <a:r>
+              <a:rPr lang="en-US" altLang="zh-CN"/>
+              <a:t>3</a:t>
+            </a:r>
+            <a:r>
+              <a:rPr lang="zh-CN" altLang="en-US"/>
+              <a:t>到</a:t>
+            </a:r>
+            <a:r>
+              <a:rPr lang="en-US" altLang="zh-CN"/>
+              <a:t>10</a:t>
+            </a:r>
+            <a:r>
+              <a:rPr lang="zh-CN" altLang="en-US"/>
+              <a:t>张实景参考图，标注好最佳机位、拍摄时段和必须保留的地标特征，从源头避免</a:t>
+            </a:r>
+            <a:r>
+              <a:rPr lang="en-US" altLang="zh-CN"/>
+              <a:t>AI</a:t>
+            </a:r>
+            <a:r>
+              <a:rPr lang="zh-CN" altLang="en-US"/>
+              <a:t>生成内容失真走样，首批已经覆盖无锡南长街、拈花湾、灵山大佛，以及泰山、黄山五个热门景区。</a:t>
+            </a:r>
+            <a:r>
+              <a:rPr lang="en-US" altLang="zh-CN"/>
+              <a:t>
+</a:t>
+            </a:r>
+            <a:r>
+              <a:rPr lang="zh-CN" altLang="en-US"/>
+              <a:t>整个生产流程嵌入三个人工干预节点，你可以修改、删除或者重新生成脚本，可以逐镜挑选符合预期的关键帧，也能在生成的视频片段里自行选择</a:t>
+            </a:r>
+            <a:r>
+              <a:rPr lang="en-US" altLang="zh-CN"/>
+              <a:t>1</a:t>
+            </a:r>
+            <a:r>
+              <a:rPr lang="zh-CN" altLang="en-US"/>
+              <a:t>秒片段，完全满足可控生产的需求。</a:t>
+            </a:r>
+            <a:r>
+              <a:rPr lang="en-US" altLang="zh-CN"/>
+              <a:t>
+</a:t>
+            </a:r>
+            <a:r>
+              <a:rPr lang="zh-CN" altLang="en-US"/>
+              <a:t>最终输出符合短视频平台要求的标准</a:t>
+            </a:r>
+            <a:r>
+              <a:rPr lang="en-US" altLang="zh-CN"/>
+              <a:t>MP4</a:t>
+            </a:r>
+            <a:r>
+              <a:rPr lang="zh-CN" altLang="en-US"/>
+              <a:t>文件，一条成品包含</a:t>
+            </a:r>
+            <a:r>
+              <a:rPr lang="en-US" altLang="zh-CN"/>
+              <a:t>24</a:t>
+            </a:r>
+            <a:r>
+              <a:rPr lang="zh-CN" altLang="en-US"/>
+              <a:t>到</a:t>
+            </a:r>
+            <a:r>
+              <a:rPr lang="en-US" altLang="zh-CN"/>
+              <a:t>30</a:t>
+            </a:r>
+            <a:r>
+              <a:rPr lang="zh-CN" altLang="en-US"/>
+              <a:t>个镜头，每个镜头严格控制为</a:t>
+            </a:r>
+            <a:r>
+              <a:rPr lang="en-US" altLang="zh-CN"/>
+              <a:t>1</a:t>
+            </a:r>
+            <a:r>
+              <a:rPr lang="zh-CN" altLang="en-US"/>
+              <a:t>秒，总时长刚好适配</a:t>
+            </a:r>
+            <a:r>
+              <a:rPr lang="en-US" altLang="zh-CN"/>
+              <a:t>30</a:t>
+            </a:r>
+            <a:r>
+              <a:rPr lang="zh-CN" altLang="en-US"/>
+              <a:t>秒左右的信息流内容；默认输出抖音小红书偏好的</a:t>
+            </a:r>
+            <a:r>
+              <a:rPr lang="en-US" altLang="zh-CN"/>
+              <a:t>9:16</a:t>
+            </a:r>
+            <a:r>
+              <a:rPr lang="zh-CN" altLang="en-US"/>
+              <a:t>竖屏，也支持切换为</a:t>
+            </a:r>
+            <a:r>
+              <a:rPr lang="en-US" altLang="zh-CN"/>
+              <a:t>16:9</a:t>
+            </a:r>
+            <a:r>
+              <a:rPr lang="zh-CN" altLang="en-US"/>
+              <a:t>横屏，成品自带烧录字幕、统一调色</a:t>
+            </a:r>
+            <a:r>
+              <a:rPr lang="en-US" altLang="zh-CN"/>
+              <a:t>LUT</a:t>
+            </a:r>
+            <a:r>
+              <a:rPr lang="zh-CN" altLang="en-US"/>
+              <a:t>和合规</a:t>
+            </a:r>
+            <a:r>
+              <a:rPr lang="en-US" altLang="zh-CN"/>
+              <a:t>AI</a:t>
+            </a:r>
+            <a:r>
+              <a:rPr lang="zh-CN" altLang="en-US"/>
+              <a:t>标识，导出后可以直接分享使用。</a:t>
+            </a:r>
+            <a:endParaRPr lang="zh-CN" altLang="en-US"/>
+          </a:p>
+        </p:txBody>
+      </p:sp>
+    </p:spTree>
+  </p:cSld>
+  <p:clrMapOvr>
+    <a:masterClrMapping/>
+  </p:clrMapOvr>
+</p:notes>
+</file>
+
+<file path=ppt/notesSlides/notesSlide7.xml><?xml version="1.0" encoding="utf-8"?>
+<p:notes xmlns:a="http://schemas.openxmlformats.org/drawingml/2006/main" xmlns:r="http://schemas.openxmlformats.org/officeDocument/2006/relationships" xmlns:p="http://schemas.openxmlformats.org/presentationml/2006/main">
+  <p:cSld>
+    <p:spTree>
+      <p:nvGrpSpPr>
+        <p:cNvPr id="1" name=""/>
+        <p:cNvGrpSpPr/>
+        <p:nvPr/>
+      </p:nvGrpSpPr>
+      <p:grpSpPr/>
+      <p:sp>
+        <p:nvSpPr>
+          <p:cNvPr id="2" name="文本占位符 1"/>
+          <p:cNvSpPr>
+            <a:spLocks noGrp="1"/>
+          </p:cNvSpPr>
+          <p:nvPr>
+            <p:ph type="body" sz="quarter"/>
+          </p:nvPr>
+        </p:nvSpPr>
+        <p:spPr>
+          <a:xfrm>
+            <a:off x="662016" y="5242000"/>
+            <a:ext cx="5296132" cy="4288909"/>
+          </a:xfrm>
+          <a:prstGeom prst="rect">
+            <a:avLst/>
+          </a:prstGeom>
+        </p:spPr>
+        <p:txBody>
+          <a:bodyPr/>
+          <a:p>
+            <a:r>
+              <a:rPr lang="zh-CN" altLang="en-US"/>
+              <a:t>我们都知道，现在市场上绝大多数</a:t>
+            </a:r>
+            <a:r>
+              <a:rPr lang="en-US" altLang="zh-CN"/>
+              <a:t>AI</a:t>
+            </a:r>
+            <a:r>
+              <a:rPr lang="zh-CN" altLang="en-US"/>
+              <a:t>视频工具都主打通用生成能力，而我们的</a:t>
+            </a:r>
+            <a:r>
+              <a:rPr lang="en-US" altLang="zh-CN"/>
+              <a:t>Kelvoy</a:t>
+            </a:r>
+            <a:r>
+              <a:rPr lang="zh-CN" altLang="en-US"/>
+              <a:t>可旅走的是完全不同的赛道</a:t>
+            </a:r>
+            <a:r>
+              <a:rPr lang="en-US" altLang="zh-CN"/>
+              <a:t>——</a:t>
+            </a:r>
+            <a:r>
+              <a:rPr lang="zh-CN" altLang="en-US"/>
+              <a:t>我们不做万能的通用视频生成器，只聚焦「虚拟角色搭配旅行目的地」这一个垂直场景。这种聚焦也让我们在四个核心维度上，拉开了和通用工具的差距。</a:t>
+            </a:r>
+            <a:r>
+              <a:rPr lang="en-US" altLang="zh-CN"/>
+              <a:t>
+</a:t>
+            </a:r>
+            <a:r>
+              <a:rPr lang="zh-CN" altLang="en-US"/>
+              <a:t>第一是角色维度。通用</a:t>
+            </a:r>
+            <a:r>
+              <a:rPr lang="en-US" altLang="zh-CN"/>
+              <a:t>AI</a:t>
+            </a:r>
+            <a:r>
+              <a:rPr lang="zh-CN" altLang="en-US"/>
+              <a:t>视频工具每次生成都要重新描述角色形象，出来的结果全靠随机，根本没法维持固定人设。可旅不一样，我们把角色做成了账号级资产，能保证角色外形跨期一致，同时满足每期换穿搭的需求，帮账号沉淀稳定的人设资产。</a:t>
+            </a:r>
+            <a:r>
+              <a:rPr lang="en-US" altLang="zh-CN"/>
+              <a:t>
+</a:t>
+            </a:r>
+            <a:r>
+              <a:rPr lang="zh-CN" altLang="en-US"/>
+              <a:t>第二是目的地维度。通用</a:t>
+            </a:r>
+            <a:r>
+              <a:rPr lang="en-US" altLang="zh-CN"/>
+              <a:t>AI</a:t>
+            </a:r>
+            <a:r>
+              <a:rPr lang="zh-CN" altLang="en-US"/>
+              <a:t>根本不懂具体地标特征，生成内容很容易失真错位，我们提前给每个景区准备了官方维护的符号包和实景参考图，从根源上保证内容保真，符合文旅宣传的真实要求。</a:t>
+            </a:r>
+            <a:r>
+              <a:rPr lang="en-US" altLang="zh-CN"/>
+              <a:t>
+</a:t>
+            </a:r>
+            <a:r>
+              <a:rPr lang="zh-CN" altLang="en-US"/>
+              <a:t>第三是叙事维度。通用工具全靠模型自由发挥，内容质量全看运气，我们针对六种常见目的地类型匹配了对应的镜头语法，产出内容的叙事逻辑更稳定，更符合旅行内容的观看习惯。</a:t>
+            </a:r>
+            <a:r>
+              <a:rPr lang="en-US" altLang="zh-CN"/>
+              <a:t>
+</a:t>
+            </a:r>
+            <a:r>
+              <a:rPr lang="zh-CN" altLang="en-US"/>
+              <a:t>第四是过程和成本维度。通用工具大多是一键黑盒模式，生成后没法修改干预，而且按次付费成本不可控。我们设计了六阶段生成流程加三个人工审核节点，全程可改可重跑，成本上以本地</a:t>
+            </a:r>
+            <a:r>
+              <a:rPr lang="en-US" altLang="zh-CN"/>
+              <a:t>DGX</a:t>
+            </a:r>
+            <a:r>
+              <a:rPr lang="zh-CN" altLang="en-US"/>
+              <a:t>运算为主，只在需要的时候调用</a:t>
+            </a:r>
+            <a:r>
+              <a:rPr lang="en-US" altLang="zh-CN"/>
+              <a:t>API</a:t>
+            </a:r>
+            <a:r>
+              <a:rPr lang="zh-CN" altLang="en-US"/>
+              <a:t>溢出，整期</a:t>
+            </a:r>
+            <a:r>
+              <a:rPr lang="en-US" altLang="zh-CN"/>
+              <a:t>Vlog</a:t>
+            </a:r>
+            <a:r>
+              <a:rPr lang="zh-CN" altLang="en-US"/>
+              <a:t>生成成本最高不超过</a:t>
+            </a:r>
+            <a:r>
+              <a:rPr lang="en-US" altLang="zh-CN"/>
+              <a:t>20</a:t>
+            </a:r>
+            <a:r>
+              <a:rPr lang="zh-CN" altLang="en-US"/>
+              <a:t>元，性价比远超同类方案。</a:t>
+            </a:r>
+            <a:r>
+              <a:rPr lang="en-US" altLang="zh-CN"/>
+              <a:t>
+</a:t>
+            </a:r>
+            <a:r>
+              <a:rPr lang="zh-CN" altLang="en-US"/>
+              <a:t>最后要强调的是，我们的核心竞争力从来不只在模型本身，真正的护城河是我们积累的角色资产、目的地资源库，以及稳定的跨期一致性能力，这是通用工具没法比的。</a:t>
+            </a:r>
+            <a:endParaRPr lang="zh-CN" altLang="en-US"/>
+          </a:p>
+        </p:txBody>
+      </p:sp>
+    </p:spTree>
+  </p:cSld>
+  <p:clrMapOvr>
+    <a:masterClrMapping/>
+  </p:clrMapOvr>
+</p:notes>
+</file>
+
+<file path=ppt/notesSlides/notesSlide8.xml><?xml version="1.0" encoding="utf-8"?>
+<p:notes xmlns:a="http://schemas.openxmlformats.org/drawingml/2006/main" xmlns:r="http://schemas.openxmlformats.org/officeDocument/2006/relationships" xmlns:p="http://schemas.openxmlformats.org/presentationml/2006/main">
+  <p:cSld>
+    <p:spTree>
+      <p:nvGrpSpPr>
+        <p:cNvPr id="1" name=""/>
+        <p:cNvGrpSpPr/>
+        <p:nvPr/>
+      </p:nvGrpSpPr>
+      <p:grpSpPr/>
+      <p:sp>
+        <p:nvSpPr>
+          <p:cNvPr id="2" name="文本占位符 1"/>
+          <p:cNvSpPr>
+            <a:spLocks noGrp="1"/>
+          </p:cNvSpPr>
+          <p:nvPr>
+            <p:ph type="body" sz="quarter"/>
+          </p:nvPr>
+        </p:nvSpPr>
+        <p:spPr>
+          <a:xfrm>
+            <a:off x="662016" y="5242000"/>
+            <a:ext cx="5296132" cy="4288909"/>
+          </a:xfrm>
+          <a:prstGeom prst="rect">
+            <a:avLst/>
+          </a:prstGeom>
+        </p:spPr>
+        <p:txBody>
+          <a:bodyPr/>
+          <a:p>
+            <a:r>
+              <a:rPr lang="zh-CN" altLang="en-US"/>
+              <a:t>我们这套生产流程，拆解为清晰的六步生成环节，搭配三个人工审核节点牢牢把控内容质量，从根源上解决了通用</a:t>
+            </a:r>
+            <a:r>
+              <a:rPr lang="en-US" altLang="zh-CN"/>
+              <a:t>AI</a:t>
+            </a:r>
+            <a:r>
+              <a:rPr lang="zh-CN" altLang="en-US"/>
+              <a:t>工具不可控、不可改的痛点。</a:t>
+            </a:r>
+            <a:r>
+              <a:rPr lang="en-US" altLang="zh-CN"/>
+              <a:t>
+</a:t>
+            </a:r>
+            <a:r>
+              <a:rPr lang="zh-CN" altLang="en-US"/>
+              <a:t>第一步建期环节，你只需要确定要使用的虚拟角色、目标旅行目的地、内容模板和输出画幅，就能快速创建一期</a:t>
+            </a:r>
+            <a:r>
+              <a:rPr lang="en-US" altLang="zh-CN"/>
+              <a:t>Vlog</a:t>
+            </a:r>
+            <a:r>
+              <a:rPr lang="zh-CN" altLang="en-US"/>
+              <a:t>生产任务。完成基础配置后，系统会自动生成包含</a:t>
+            </a:r>
+            <a:r>
+              <a:rPr lang="en-US" altLang="zh-CN"/>
+              <a:t>24</a:t>
+            </a:r>
+            <a:r>
+              <a:rPr lang="zh-CN" altLang="en-US"/>
+              <a:t>到</a:t>
+            </a:r>
+            <a:r>
+              <a:rPr lang="en-US" altLang="zh-CN"/>
+              <a:t>30</a:t>
+            </a:r>
+            <a:r>
+              <a:rPr lang="zh-CN" altLang="en-US"/>
+              <a:t>镜内容、带逐镜字幕的</a:t>
+            </a:r>
+            <a:r>
+              <a:rPr lang="en-US" altLang="zh-CN"/>
+              <a:t>JSON</a:t>
+            </a:r>
+            <a:r>
+              <a:rPr lang="zh-CN" altLang="en-US"/>
+              <a:t>格式脚本，接着系统会拉取对应角色资产生成版本快照和参考图集。如果选择传统精修路径，系统会为每一镜生成</a:t>
+            </a:r>
+            <a:r>
+              <a:rPr lang="en-US" altLang="zh-CN"/>
+              <a:t>1</a:t>
+            </a:r>
+            <a:r>
+              <a:rPr lang="zh-CN" altLang="en-US"/>
+              <a:t>到</a:t>
+            </a:r>
+            <a:r>
+              <a:rPr lang="en-US" altLang="zh-CN"/>
+              <a:t>3</a:t>
+            </a:r>
+            <a:r>
+              <a:rPr lang="zh-CN" altLang="en-US"/>
+              <a:t>张关键帧候选图，之后再基于选定的关键帧生成</a:t>
+            </a:r>
+            <a:r>
+              <a:rPr lang="en-US" altLang="zh-CN"/>
+              <a:t>3</a:t>
+            </a:r>
+            <a:r>
+              <a:rPr lang="zh-CN" altLang="en-US"/>
+              <a:t>到</a:t>
+            </a:r>
+            <a:r>
+              <a:rPr lang="en-US" altLang="zh-CN"/>
+              <a:t>5</a:t>
+            </a:r>
+            <a:r>
+              <a:rPr lang="zh-CN" altLang="en-US"/>
+              <a:t>秒的视频片段，你只需要从中截取符合要求的</a:t>
+            </a:r>
+            <a:r>
+              <a:rPr lang="en-US" altLang="zh-CN"/>
+              <a:t>1</a:t>
+            </a:r>
+            <a:r>
+              <a:rPr lang="zh-CN" altLang="en-US"/>
+              <a:t>秒内容，最终系统会自动完成卡点、调色、烧录字幕、添加</a:t>
+            </a:r>
+            <a:r>
+              <a:rPr lang="en-US" altLang="zh-CN"/>
+              <a:t>AI</a:t>
+            </a:r>
+            <a:r>
+              <a:rPr lang="zh-CN" altLang="en-US"/>
+              <a:t>标识，输出完整的成片</a:t>
+            </a:r>
+            <a:r>
+              <a:rPr lang="en-US" altLang="zh-CN"/>
+              <a:t>MP4</a:t>
+            </a:r>
+            <a:r>
+              <a:rPr lang="zh-CN" altLang="en-US"/>
+              <a:t>。</a:t>
+            </a:r>
+            <a:r>
+              <a:rPr lang="en-US" altLang="zh-CN"/>
+              <a:t>
+</a:t>
+            </a:r>
+            <a:r>
+              <a:rPr lang="zh-CN" altLang="en-US"/>
+              <a:t>三个审核节点分别设置在脚本生成、关键帧产出和片段生成环节，每个环节都支持修改内容、重新生成，创作者完全掌握内容主导权。这套流程的核心设计思路，是把</a:t>
+            </a:r>
+            <a:r>
+              <a:rPr lang="en-US" altLang="zh-CN"/>
+              <a:t>AI</a:t>
+            </a:r>
+            <a:r>
+              <a:rPr lang="zh-CN" altLang="en-US"/>
+              <a:t>生成的不确定性都放在成本更低的静帧阶段处理，视频环节只需要让模型完成画面动态化，最终的剪辑节奏交给合成环节把控，既控制了生成成本，又保证了成片质量的稳定性。所有片段审核通过后，才会进入最终的合成步骤，从流程上避免了无效算力浪费。</a:t>
+            </a:r>
+            <a:endParaRPr lang="zh-CN" altLang="en-US"/>
+          </a:p>
+        </p:txBody>
+      </p:sp>
+    </p:spTree>
+  </p:cSld>
+  <p:clrMapOvr>
+    <a:masterClrMapping/>
+  </p:clrMapOvr>
+</p:notes>
+</file>
+
+<file path=ppt/notesSlides/notesSlide9.xml><?xml version="1.0" encoding="utf-8"?>
+<p:notes xmlns:a="http://schemas.openxmlformats.org/drawingml/2006/main" xmlns:r="http://schemas.openxmlformats.org/officeDocument/2006/relationships" xmlns:p="http://schemas.openxmlformats.org/presentationml/2006/main">
+  <p:cSld>
+    <p:spTree>
+      <p:nvGrpSpPr>
+        <p:cNvPr id="1" name=""/>
+        <p:cNvGrpSpPr/>
+        <p:nvPr/>
+      </p:nvGrpSpPr>
+      <p:grpSpPr/>
+      <p:sp>
+        <p:nvSpPr>
+          <p:cNvPr id="2" name="文本占位符 1"/>
+          <p:cNvSpPr>
+            <a:spLocks noGrp="1"/>
+          </p:cNvSpPr>
+          <p:nvPr>
+            <p:ph type="body" sz="quarter"/>
+          </p:nvPr>
+        </p:nvSpPr>
+        <p:spPr>
+          <a:xfrm>
+            <a:off x="662016" y="5242000"/>
+            <a:ext cx="5296132" cy="4288909"/>
+          </a:xfrm>
+          <a:prstGeom prst="rect">
+            <a:avLst/>
+          </a:prstGeom>
+        </p:spPr>
+        <p:txBody>
+          <a:bodyPr/>
+          <a:p>
+            <a:r>
+              <a:rPr lang="zh-CN" altLang="en-US"/>
+              <a:t>可旅</a:t>
+            </a:r>
+            <a:r>
+              <a:rPr lang="en-US" altLang="zh-CN"/>
+              <a:t> Kelvoy </a:t>
+            </a:r>
+            <a:r>
+              <a:rPr lang="zh-CN" altLang="en-US"/>
+              <a:t>针对不同产出需求，设计了两条生产路径，匹配不同的效率和质量要求。系统默认推荐直出视频路径，全程以角色和地标的参考图直接生成视频，跳过了图片候选和关键帧人工挑选环节，不产生额外的图片积分消耗，完整生产周期最短，单条</a:t>
+            </a:r>
+            <a:r>
+              <a:rPr lang="en-US" altLang="zh-CN"/>
+              <a:t>Vlog</a:t>
+            </a:r>
+            <a:r>
+              <a:rPr lang="zh-CN" altLang="en-US"/>
+              <a:t>的生成成本也控制在最低区间，完美适配文旅代运营客户批量更新账号内容的核心需求。</a:t>
+            </a:r>
+            <a:r>
+              <a:rPr lang="en-US" altLang="zh-CN"/>
+              <a:t>
+</a:t>
+            </a:r>
+            <a:r>
+              <a:rPr lang="zh-CN" altLang="en-US"/>
+              <a:t>如果创作者需要打造爆款重点内容，可以选择精修关键帧的传统路径。这条路径会先生成多张候选关键帧，创作者可以逐镜挑选满意画面，不满意还能修改提示词重新生成，最终用选定的关键帧作为基础生成视频，实现逐镜可控的精细调整。</a:t>
+            </a:r>
+            <a:r>
+              <a:rPr lang="en-US" altLang="zh-CN"/>
+              <a:t>
+</a:t>
+            </a:r>
+            <a:r>
+              <a:rPr lang="zh-CN" altLang="en-US"/>
+              <a:t>为保障老用户的使用体验，原有项目保留原流程运行，不会自动转换格式，已有的逐镜项目也支持手动迁移到新版剪辑流程，兼顾功能迭代和历史兼容。</a:t>
+            </a:r>
+            <a:endParaRPr lang="zh-CN" altLang="en-US"/>
+          </a:p>
+        </p:txBody>
+      </p:sp>
+    </p:spTree>
+  </p:cSld>
+  <p:clrMapOvr>
+    <a:masterClrMapping/>
+  </p:clrMapOvr>
+</p:notes>
 </file>
 
 <file path=ppt/slideLayouts/slideLayout1.xml><?xml version="1.0" encoding="utf-8"?>
@@ -1328,7 +4197,7 @@
                 <a:latin typeface="微软雅黑" panose="020B0503020204020204" charset="-122"/>
                 <a:ea typeface="微软雅黑" panose="020B0503020204020204" charset="-122"/>
               </a:rPr>
-              <a:t>24–30 </a:t>
+              <a:t>5–10 </a:t>
             </a:r>
             <a:r>
               <a:rPr lang="zh-CN" sz="975">
@@ -1376,7 +4245,7 @@
                 <a:latin typeface="微软雅黑" panose="020B0503020204020204" charset="-122"/>
                 <a:ea typeface="微软雅黑" panose="020B0503020204020204" charset="-122"/>
               </a:rPr>
-              <a:t> 1 </a:t>
+              <a:t> 3-4 </a:t>
             </a:r>
             <a:r>
               <a:rPr lang="zh-CN" sz="975">

--- a/docs/demo/Kelvoy可旅_DEMO-V0.3.pptx
+++ b/docs/demo/Kelvoy可旅_DEMO-V0.3.pptx
@@ -7910,7 +7910,7 @@
                 <a:latin typeface="微软雅黑" panose="020B0503020204020204" charset="-122"/>
                 <a:ea typeface="微软雅黑" panose="020B0503020204020204" charset="-122"/>
               </a:rPr>
-              <a:t>1 </a:t>
+              <a:t>3-4 </a:t>
             </a:r>
             <a:r>
               <a:rPr lang="zh-CN" sz="940">
@@ -13327,7 +13327,7 @@
                 <a:latin typeface="微软雅黑" panose="020B0503020204020204" charset="-122"/>
                 <a:ea typeface="微软雅黑" panose="020B0503020204020204" charset="-122"/>
               </a:rPr>
-              <a:t> → 24–30 </a:t>
+              <a:t> → 5-10 </a:t>
             </a:r>
             <a:r>
               <a:rPr lang="zh-CN" sz="940">
@@ -18980,7 +18980,7 @@
         </p:nvSpPr>
         <p:spPr>
           <a:xfrm>
-            <a:off x="3829050" y="2990850"/>
+            <a:off x="3600450" y="2981325"/>
             <a:ext cx="228600" cy="219075"/>
           </a:xfrm>
           <a:prstGeom prst="rect">
@@ -19003,7 +19003,7 @@
                 <a:latin typeface="微软雅黑" panose="020B0503020204020204" charset="-122"/>
                 <a:ea typeface="微软雅黑" panose="020B0503020204020204" charset="-122"/>
               </a:rPr>
-              <a:t>10</a:t>
+              <a:t>5-10</a:t>
             </a:r>
             <a:endParaRPr lang="en-US" sz="1425" b="1">
               <a:solidFill>
@@ -25482,7 +25482,7 @@
                 <a:latin typeface="微软雅黑" panose="020B0503020204020204" charset="-122"/>
                 <a:ea typeface="微软雅黑" panose="020B0503020204020204" charset="-122"/>
               </a:rPr>
-              <a:t> 1 </a:t>
+              <a:t> </a:t>
             </a:r>
             <a:r>
               <a:rPr lang="zh-CN" sz="940">
@@ -25492,7 +25492,7 @@
                 <a:latin typeface="微软雅黑" panose="020B0503020204020204" charset="-122"/>
                 <a:ea typeface="微软雅黑" panose="020B0503020204020204" charset="-122"/>
               </a:rPr>
-              <a:t>秒；勾五项质量红线；标一镜坏镜重生成</a:t>
+              <a:t>；勾五项质量红线；标一镜坏镜重生成</a:t>
             </a:r>
             <a:endParaRPr lang="zh-CN" sz="940">
               <a:solidFill>
@@ -29672,7 +29672,7 @@
                 <a:latin typeface="微软雅黑" panose="020B0503020204020204" charset="-122"/>
                 <a:ea typeface="微软雅黑" panose="020B0503020204020204" charset="-122"/>
               </a:rPr>
-              <a:t> + 1 </a:t>
+              <a:t> + 3-4 </a:t>
             </a:r>
             <a:r>
               <a:rPr lang="zh-CN" sz="1015">
@@ -36464,7 +36464,7 @@
                 <a:latin typeface="微软雅黑" panose="020B0503020204020204" charset="-122"/>
                 <a:ea typeface="微软雅黑" panose="020B0503020204020204" charset="-122"/>
               </a:rPr>
-              <a:t> 1 </a:t>
+              <a:t> 3-4 </a:t>
             </a:r>
             <a:r>
               <a:rPr lang="zh-CN" sz="940">
@@ -36749,7 +36749,7 @@
                 <a:latin typeface="微软雅黑" panose="020B0503020204020204" charset="-122"/>
                 <a:ea typeface="微软雅黑" panose="020B0503020204020204" charset="-122"/>
               </a:rPr>
-              <a:t>24–30 </a:t>
+              <a:t>5–10 </a:t>
             </a:r>
             <a:r>
               <a:rPr lang="zh-CN" sz="900">
@@ -36797,7 +36797,7 @@
                 <a:latin typeface="微软雅黑" panose="020B0503020204020204" charset="-122"/>
                 <a:ea typeface="微软雅黑" panose="020B0503020204020204" charset="-122"/>
               </a:rPr>
-              <a:t> 1 </a:t>
+              <a:t> 3-4</a:t>
             </a:r>
             <a:r>
               <a:rPr lang="zh-CN" sz="900">
@@ -41875,7 +41875,7 @@
                 <a:latin typeface="微软雅黑" panose="020B0503020204020204" charset="-122"/>
                 <a:ea typeface="微软雅黑" panose="020B0503020204020204" charset="-122"/>
               </a:rPr>
-              <a:t>24–30 </a:t>
+              <a:t>5-10 </a:t>
             </a:r>
             <a:r>
               <a:rPr lang="zh-CN" sz="900">
@@ -42738,7 +42738,7 @@
                 <a:latin typeface="微软雅黑" panose="020B0503020204020204" charset="-122"/>
                 <a:ea typeface="微软雅黑" panose="020B0503020204020204" charset="-122"/>
               </a:rPr>
-              <a:t>3–5 </a:t>
+              <a:t>3–4 </a:t>
             </a:r>
             <a:r>
               <a:rPr lang="zh-CN" sz="900">
@@ -42750,26 +42750,6 @@
               </a:rPr>
               <a:t>秒片段
 截取</a:t>
-            </a:r>
-            <a:r>
-              <a:rPr lang="en-US" sz="900">
-                <a:solidFill>
-                  <a:srgbClr val="5B6B84"/>
-                </a:solidFill>
-                <a:latin typeface="微软雅黑" panose="020B0503020204020204" charset="-122"/>
-                <a:ea typeface="微软雅黑" panose="020B0503020204020204" charset="-122"/>
-              </a:rPr>
-              <a:t> 1 </a:t>
-            </a:r>
-            <a:r>
-              <a:rPr lang="zh-CN" sz="900">
-                <a:solidFill>
-                  <a:srgbClr val="5B6B84"/>
-                </a:solidFill>
-                <a:latin typeface="微软雅黑" panose="020B0503020204020204" charset="-122"/>
-                <a:ea typeface="微软雅黑" panose="020B0503020204020204" charset="-122"/>
-              </a:rPr>
-              <a:t>秒</a:t>
             </a:r>
             <a:endParaRPr lang="zh-CN" sz="900">
               <a:solidFill>
@@ -46120,7 +46100,7 @@
                 <a:latin typeface="微软雅黑" panose="020B0503020204020204" charset="-122"/>
                 <a:ea typeface="微软雅黑" panose="020B0503020204020204" charset="-122"/>
               </a:rPr>
-              <a:t> 3–5 </a:t>
+              <a:t> 3–4 </a:t>
             </a:r>
             <a:r>
               <a:rPr lang="zh-CN" sz="975">
@@ -46130,27 +46110,7 @@
                 <a:latin typeface="微软雅黑" panose="020B0503020204020204" charset="-122"/>
                 <a:ea typeface="微软雅黑" panose="020B0503020204020204" charset="-122"/>
               </a:rPr>
-              <a:t>秒素材，用户截取严格</a:t>
-            </a:r>
-            <a:r>
-              <a:rPr lang="en-US" sz="975">
-                <a:solidFill>
-                  <a:srgbClr val="42536B"/>
-                </a:solidFill>
-                <a:latin typeface="微软雅黑" panose="020B0503020204020204" charset="-122"/>
-                <a:ea typeface="微软雅黑" panose="020B0503020204020204" charset="-122"/>
-              </a:rPr>
-              <a:t> 1 </a:t>
-            </a:r>
-            <a:r>
-              <a:rPr lang="zh-CN" sz="975">
-                <a:solidFill>
-                  <a:srgbClr val="42536B"/>
-                </a:solidFill>
-                <a:latin typeface="微软雅黑" panose="020B0503020204020204" charset="-122"/>
-                <a:ea typeface="微软雅黑" panose="020B0503020204020204" charset="-122"/>
-              </a:rPr>
-              <a:t>秒</a:t>
+              <a:t>秒素材，用户截取</a:t>
             </a:r>
             <a:endParaRPr lang="zh-CN" sz="975">
               <a:solidFill>
